--- a/reports/slides/PhaseI_briefing.pptx
+++ b/reports/slides/PhaseI_briefing.pptx
@@ -12,6 +12,8 @@
     <p:sldId id="260" r:id="rId12"/>
     <p:sldId id="261" r:id="rId13"/>
     <p:sldId id="262" r:id="rId14"/>
+    <p:sldId id="263" r:id="rId15"/>
+    <p:sldId id="264" r:id="rId16"/>
   </p:sldIdLst>
   <p:sldSz cx="12191695" cy="6858000" type="screen4x3"/>
   <p:notesSz cx="6858000" cy="9144000"/>
@@ -740,13 +742,19 @@
           <a:lstStyle/>
           <a:p>
             <a:r>
-              <a:t>This is both the mechanism and the limitation, and saying so is the point. Daily supervision recalibrates magnitude. It does not teach sub-daily timing, and no daily signal could.</a:t>
+              <a:t>Use this slide for scale and generality, not for a number. Four continents, six agencies, 8,843 gauges plus 282 African basins.</a:t>
             </a:r>
           </a:p>
           <a:p/>
           <a:p>
             <a:r>
-              <a:t>Expect the question: is this just a bias correction? Current answer: if it were only a rescaling, hourly supervision should do everything daily does and add timing, and it does not. It loses by 0.021 and it loses on alpha. The direct test is the rescaling control, still running.</a:t>
+              <a:t>Australia and the western United States stay dark in both panels. Those are the arid and highly regulated catchments, where a rainfall-runoff model has the least to work with. Saying so before being asked is better than being asked.</a:t>
+            </a:r>
+          </a:p>
+          <a:p/>
+          <a:p>
+            <a:r>
+              <a:t>The report's version of this map has twelve panels and adds the three KGE components and a normalised difference column. That density suits a page, not a glance.</a:t>
             </a:r>
           </a:p>
         </p:txBody>
@@ -816,7 +824,13 @@
           <a:lstStyle/>
           <a:p>
             <a:r>
-              <a:t>Fold-to-fold spread also rises sharply under blocking, from 0.0035 to 0.0411, a factor of 11.8, because each blocked fold holds out different continents and climates rather than a different sample of the same regions. Report the blocked numbers as the honest ones; the random split flatters both the level and the precision.</a:t>
+              <a:t>This is both the mechanism and the limitation, and saying so is the point. Daily supervision recalibrates magnitude. It does not teach sub-daily timing, and no daily signal could.</a:t>
+            </a:r>
+          </a:p>
+          <a:p/>
+          <a:p>
+            <a:r>
+              <a:t>Expect the question: is this just a bias correction? Current answer: if it were only a rescaling, hourly supervision should do everything daily does and add timing, and it does not. It loses by 0.021 and it loses on alpha. The direct test is the rescaling control, still running.</a:t>
             </a:r>
           </a:p>
         </p:txBody>
@@ -886,13 +900,13 @@
           <a:lstStyle/>
           <a:p>
             <a:r>
-              <a:t>Most transfer-learning papers do not report what the source domain loses. This slide is about method rigour as much as about replay.</a:t>
+              <a:t>This is the slide that makes the result felt rather than reported. Point at the lower panel: blue peaks at about 7 mm/d against an observed 19, orange reaches about 10. The correction is real and it is incomplete, and both are visible.</a:t>
             </a:r>
           </a:p>
           <a:p/>
           <a:p>
             <a:r>
-              <a:t>Note the asymmetry that matters: blocking more than doubles the damage, from 0.051 to 0.120, and replay then returns a larger share of it. So replay is not an artefact of the easy split.</a:t>
+              <a:t>Chosen by rank, the median and upper quartile, so the pair cannot drift into being the two that happen to look best. The lower-quartile catchment is nearly flat all year and shows an honest but unreadable case; it is in the report as fig07 with all three.</a:t>
             </a:r>
           </a:p>
         </p:txBody>
@@ -918,6 +932,152 @@
 </file>
 
 <file path=ppt/notesSlides/notesSlide7.xml><?xml version="1.0" encoding="utf-8"?>
+<p:notes xmlns:a="http://schemas.openxmlformats.org/drawingml/2006/main" xmlns:p="http://schemas.openxmlformats.org/presentationml/2006/main" xmlns:r="http://schemas.openxmlformats.org/officeDocument/2006/relationships">
+  <p:cSld>
+    <p:spTree>
+      <p:nvGrpSpPr>
+        <p:cNvPr id="1" name=""/>
+        <p:cNvGrpSpPr/>
+        <p:nvPr/>
+      </p:nvGrpSpPr>
+      <p:grpSpPr>
+        <a:xfrm>
+          <a:off x="0" y="0"/>
+          <a:ext cx="0" cy="0"/>
+          <a:chOff x="0" y="0"/>
+          <a:chExt cx="0" cy="0"/>
+        </a:xfrm>
+      </p:grpSpPr>
+      <p:sp>
+        <p:nvSpPr>
+          <p:cNvPr id="2" name="Slide Image Placeholder 1"/>
+          <p:cNvSpPr>
+            <a:spLocks noGrp="1"/>
+          </p:cNvSpPr>
+          <p:nvPr>
+            <p:ph type="sldImg" idx="2"/>
+          </p:nvPr>
+        </p:nvSpPr>
+        <p:spPr/>
+      </p:sp>
+      <p:sp>
+        <p:nvSpPr>
+          <p:cNvPr id="3" name="Notes Placeholder 2"/>
+          <p:cNvSpPr>
+            <a:spLocks noGrp="1"/>
+          </p:cNvSpPr>
+          <p:nvPr>
+            <p:ph type="body" idx="3" sz="quarter"/>
+          </p:nvPr>
+        </p:nvSpPr>
+        <p:spPr/>
+        <p:txBody>
+          <a:bodyPr/>
+          <a:lstStyle/>
+          <a:p>
+            <a:r>
+              <a:t>Fold-to-fold spread also rises sharply under blocking, from 0.0035 to 0.0411, a factor of 11.8, because each blocked fold holds out different continents and climates rather than a different sample of the same regions. Report the blocked numbers as the honest ones; the random split flatters both the level and the precision.</a:t>
+            </a:r>
+          </a:p>
+        </p:txBody>
+      </p:sp>
+      <p:sp>
+        <p:nvSpPr>
+          <p:cNvPr id="4" name="Slide Number Placeholder 3"/>
+          <p:cNvSpPr>
+            <a:spLocks noGrp="1"/>
+          </p:cNvSpPr>
+          <p:nvPr>
+            <p:ph type="sldNum" idx="5" sz="quarter"/>
+          </p:nvPr>
+        </p:nvSpPr>
+        <p:spPr/>
+      </p:sp>
+    </p:spTree>
+  </p:cSld>
+  <p:clrMapOvr>
+    <a:masterClrMapping/>
+  </p:clrMapOvr>
+</p:notes>
+</file>
+
+<file path=ppt/notesSlides/notesSlide8.xml><?xml version="1.0" encoding="utf-8"?>
+<p:notes xmlns:a="http://schemas.openxmlformats.org/drawingml/2006/main" xmlns:p="http://schemas.openxmlformats.org/presentationml/2006/main" xmlns:r="http://schemas.openxmlformats.org/officeDocument/2006/relationships">
+  <p:cSld>
+    <p:spTree>
+      <p:nvGrpSpPr>
+        <p:cNvPr id="1" name=""/>
+        <p:cNvGrpSpPr/>
+        <p:nvPr/>
+      </p:nvGrpSpPr>
+      <p:grpSpPr>
+        <a:xfrm>
+          <a:off x="0" y="0"/>
+          <a:ext cx="0" cy="0"/>
+          <a:chOff x="0" y="0"/>
+          <a:chExt cx="0" cy="0"/>
+        </a:xfrm>
+      </p:grpSpPr>
+      <p:sp>
+        <p:nvSpPr>
+          <p:cNvPr id="2" name="Slide Image Placeholder 1"/>
+          <p:cNvSpPr>
+            <a:spLocks noGrp="1"/>
+          </p:cNvSpPr>
+          <p:nvPr>
+            <p:ph type="sldImg" idx="2"/>
+          </p:nvPr>
+        </p:nvSpPr>
+        <p:spPr/>
+      </p:sp>
+      <p:sp>
+        <p:nvSpPr>
+          <p:cNvPr id="3" name="Notes Placeholder 2"/>
+          <p:cNvSpPr>
+            <a:spLocks noGrp="1"/>
+          </p:cNvSpPr>
+          <p:nvPr>
+            <p:ph type="body" idx="3" sz="quarter"/>
+          </p:nvPr>
+        </p:nvSpPr>
+        <p:spPr/>
+        <p:txBody>
+          <a:bodyPr/>
+          <a:lstStyle/>
+          <a:p>
+            <a:r>
+              <a:t>Most transfer-learning papers do not report what the source domain loses. This slide is about method rigour as much as about replay.</a:t>
+            </a:r>
+          </a:p>
+          <a:p/>
+          <a:p>
+            <a:r>
+              <a:t>Note the asymmetry that matters: blocking more than doubles the damage, from 0.051 to 0.120, and replay then returns a larger share of it. So replay is not an artefact of the easy split.</a:t>
+            </a:r>
+          </a:p>
+        </p:txBody>
+      </p:sp>
+      <p:sp>
+        <p:nvSpPr>
+          <p:cNvPr id="4" name="Slide Number Placeholder 3"/>
+          <p:cNvSpPr>
+            <a:spLocks noGrp="1"/>
+          </p:cNvSpPr>
+          <p:nvPr>
+            <p:ph type="sldNum" idx="5" sz="quarter"/>
+          </p:nvPr>
+        </p:nvSpPr>
+        <p:spPr/>
+      </p:sp>
+    </p:spTree>
+  </p:cSld>
+  <p:clrMapOvr>
+    <a:masterClrMapping/>
+  </p:clrMapOvr>
+</p:notes>
+</file>
+
+<file path=ppt/notesSlides/notesSlide9.xml><?xml version="1.0" encoding="utf-8"?>
 <p:notes xmlns:a="http://schemas.openxmlformats.org/drawingml/2006/main" xmlns:p="http://schemas.openxmlformats.org/presentationml/2006/main" xmlns:r="http://schemas.openxmlformats.org/officeDocument/2006/relationships">
   <p:cSld>
     <p:spTree>
@@ -4630,7 +4790,7 @@
                 </a:solidFill>
                 <a:latin typeface="Calibri"/>
               </a:rPr>
-              <a:t>Why it works, and what it cannot do</a:t>
+              <a:t>The same result, seen rather than tabulated</a:t>
             </a:r>
           </a:p>
         </p:txBody>
@@ -4681,7 +4841,7 @@
       </p:sp>
       <p:pic>
         <p:nvPicPr>
-          <p:cNvPr id="4" name="Picture 3" descr="fig11_component_deficits.png"/>
+          <p:cNvPr id="4" name="Picture 3" descr="fig15_slide_map.png"/>
           <p:cNvPicPr>
             <a:picLocks noChangeAspect="1"/>
           </p:cNvPicPr>
@@ -4695,8 +4855,8 @@
         </p:blipFill>
         <p:spPr>
           <a:xfrm>
-            <a:off x="1977584" y="1627632"/>
-            <a:ext cx="8236527" cy="2743200"/>
+            <a:off x="1825426" y="1627632"/>
+            <a:ext cx="8540842" cy="2286000"/>
           </a:xfrm>
           <a:prstGeom prst="rect">
             <a:avLst/>
@@ -4711,8 +4871,8 @@
         </p:nvSpPr>
         <p:spPr>
           <a:xfrm>
-            <a:off x="640080" y="4572000"/>
-            <a:ext cx="10881360" cy="1148080"/>
+            <a:off x="640080" y="4114800"/>
+            <a:ext cx="10881360" cy="883920"/>
           </a:xfrm>
           <a:prstGeom prst="rect">
             <a:avLst/>
@@ -4731,13 +4891,13 @@
               </a:lnSpc>
             </a:pPr>
             <a:r>
-              <a:rPr sz="1600" b="0">
-                <a:solidFill>
-                  <a:srgbClr val="1A1A1A"/>
+              <a:rPr sz="1600" b="1">
+                <a:solidFill>
+                  <a:srgbClr val="EB6834"/>
                 </a:solidFill>
                 <a:latin typeface="Calibri"/>
               </a:rPr>
-              <a:t>A 24-hour total carries magnitude information and no sub-daily timing information, so it should repair amplitude and volume and leave timing alone.</a:t>
+              <a:t>Panel (b) is greener almost everywhere, across four continents and six national networks.</a:t>
             </a:r>
           </a:p>
           <a:p>
@@ -4747,13 +4907,13 @@
               </a:lnSpc>
             </a:pPr>
             <a:r>
-              <a:rPr sz="1600" b="1">
-                <a:solidFill>
-                  <a:srgbClr val="EB6834"/>
+              <a:rPr sz="1600" b="0">
+                <a:solidFill>
+                  <a:srgbClr val="1A1A1A"/>
                 </a:solidFill>
                 <a:latin typeface="Calibri"/>
               </a:rPr>
-              <a:t>It does. Temperate: 25% of the magnitude deficit against 7% of the timing deficit. Africa: 72% against 32%.</a:t>
+              <a:t>A median cannot show that the result belongs to no single region. The African basins are the larger markers.</a:t>
             </a:r>
           </a:p>
         </p:txBody>
@@ -4766,7 +4926,7 @@
         </p:nvSpPr>
         <p:spPr>
           <a:xfrm>
-            <a:off x="640080" y="5774944"/>
+            <a:off x="640080" y="5053584"/>
             <a:ext cx="10881360" cy="252095"/>
           </a:xfrm>
           <a:prstGeom prst="rect">
@@ -4792,7 +4952,7 @@
                 </a:solidFill>
                 <a:latin typeface="Calibri"/>
               </a:rPr>
-              <a:t>Deficit is 1 - r for the correlation and |log2 x| for the two ratios, so only the fraction removed is comparable across components.</a:t>
+              <a:t>Both panels share one colour scale, so they are read against each other by construction. Coastlines and national borders at 110 m resolution.</a:t>
             </a:r>
           </a:p>
         </p:txBody>
@@ -4849,7 +5009,7 @@
                 </a:solidFill>
                 <a:latin typeface="Calibri"/>
               </a:rPr>
-              <a:t>The blocked split, agency by agency</a:t>
+              <a:t>Why it works, and what it cannot do</a:t>
             </a:r>
           </a:p>
         </p:txBody>
@@ -4900,7 +5060,7 @@
       </p:sp>
       <p:pic>
         <p:nvPicPr>
-          <p:cNvPr id="4" name="Picture 3" descr="fig04_agency_recovery.png"/>
+          <p:cNvPr id="4" name="Picture 3" descr="fig11_component_deficits.png"/>
           <p:cNvPicPr>
             <a:picLocks noChangeAspect="1"/>
           </p:cNvPicPr>
@@ -4914,8 +5074,8 @@
         </p:blipFill>
         <p:spPr>
           <a:xfrm>
-            <a:off x="2527667" y="1627632"/>
-            <a:ext cx="7136360" cy="2926080"/>
+            <a:off x="1977584" y="1627632"/>
+            <a:ext cx="8236527" cy="2743200"/>
           </a:xfrm>
           <a:prstGeom prst="rect">
             <a:avLst/>
@@ -4930,8 +5090,8 @@
         </p:nvSpPr>
         <p:spPr>
           <a:xfrm>
-            <a:off x="640080" y="4754880"/>
-            <a:ext cx="10881360" cy="883920"/>
+            <a:off x="640080" y="4572000"/>
+            <a:ext cx="10881360" cy="1148080"/>
           </a:xfrm>
           <a:prstGeom prst="rect">
             <a:avLst/>
@@ -4950,13 +5110,13 @@
               </a:lnSpc>
             </a:pPr>
             <a:r>
-              <a:rPr sz="1600" b="1">
-                <a:solidFill>
-                  <a:srgbClr val="EB6834"/>
+              <a:rPr sz="1600" b="0">
+                <a:solidFill>
+                  <a:srgbClr val="1A1A1A"/>
                 </a:solidFill>
                 <a:latin typeface="Calibri"/>
               </a:rPr>
-              <a:t>Five of six networks recover 85 to 102 percent of what spatial blocking costs. Iceland, with 73 gauges, recovers 38 percent.</a:t>
+              <a:t>A 24-hour total carries magnitude information and no sub-daily timing information, so it should repair amplitude and volume and leave timing alone.</a:t>
             </a:r>
           </a:p>
           <a:p>
@@ -4966,13 +5126,13 @@
               </a:lnSpc>
             </a:pPr>
             <a:r>
-              <a:rPr sz="1600" b="0">
-                <a:solidFill>
-                  <a:srgbClr val="1A1A1A"/>
+              <a:rPr sz="1600" b="1">
+                <a:solidFill>
+                  <a:srgbClr val="EB6834"/>
                 </a:solidFill>
                 <a:latin typeface="Calibri"/>
               </a:rPr>
-              <a:t>The method is weakest exactly where the gauge network is sparsest, which is worth stating plainly.</a:t>
+              <a:t>It does. Temperate: 25% of the magnitude deficit against 7% of the timing deficit. Africa: 72% against 32%.</a:t>
             </a:r>
           </a:p>
         </p:txBody>
@@ -4985,7 +5145,7 @@
         </p:nvSpPr>
         <p:spPr>
           <a:xfrm>
-            <a:off x="640080" y="5693664"/>
+            <a:off x="640080" y="5774944"/>
             <a:ext cx="10881360" cy="252095"/>
           </a:xfrm>
           <a:prstGeom prst="rect">
@@ -5011,7 +5171,7 @@
                 </a:solidFill>
                 <a:latin typeface="Calibri"/>
               </a:rPr>
-              <a:t>Blocking is 120 k-means blocks on 3-D unit vectors, packed whole into five folds, so fold sizes stay within 10 gauges of the random split's.</a:t>
+              <a:t>Deficit is 1 - r for the correlation and |log2 x| for the two ratios, so only the fraction removed is comparable across components.</a:t>
             </a:r>
           </a:p>
         </p:txBody>
@@ -5068,7 +5228,7 @@
                 </a:solidFill>
                 <a:latin typeface="Calibri"/>
               </a:rPr>
-              <a:t>The cost to the source domain, and how much of it comes back</a:t>
+              <a:t>What the repair looks like in a single catchment</a:t>
             </a:r>
           </a:p>
         </p:txBody>
@@ -5119,6 +5279,444 @@
       </p:sp>
       <p:pic>
         <p:nvPicPr>
+          <p:cNvPr id="4" name="Picture 3" descr="fig14_slide_hydrograph.png"/>
+          <p:cNvPicPr>
+            <a:picLocks noChangeAspect="1"/>
+          </p:cNvPicPr>
+          <p:nvPr/>
+        </p:nvPicPr>
+        <p:blipFill>
+          <a:blip r:embed="rId2"/>
+          <a:stretch>
+            <a:fillRect/>
+          </a:stretch>
+        </p:blipFill>
+        <p:spPr>
+          <a:xfrm>
+            <a:off x="3147651" y="1627632"/>
+            <a:ext cx="5896393" cy="2651760"/>
+          </a:xfrm>
+          <a:prstGeom prst="rect">
+            <a:avLst/>
+          </a:prstGeom>
+        </p:spPr>
+      </p:pic>
+      <p:sp>
+        <p:nvSpPr>
+          <p:cNvPr id="5" name="TextBox 4"/>
+          <p:cNvSpPr txBox="1"/>
+          <p:nvPr/>
+        </p:nvSpPr>
+        <p:spPr>
+          <a:xfrm>
+            <a:off x="640080" y="4480559"/>
+            <a:ext cx="10881360" cy="883920"/>
+          </a:xfrm>
+          <a:prstGeom prst="rect">
+            <a:avLst/>
+          </a:prstGeom>
+          <a:noFill/>
+        </p:spPr>
+        <p:txBody>
+          <a:bodyPr wrap="square">
+            <a:spAutoFit/>
+          </a:bodyPr>
+          <a:lstStyle/>
+          <a:p>
+            <a:pPr algn="l">
+              <a:lnSpc>
+                <a:spcPct val="130000"/>
+              </a:lnSpc>
+            </a:pPr>
+            <a:r>
+              <a:rPr sz="1600" b="1">
+                <a:solidFill>
+                  <a:srgbClr val="EB6834"/>
+                </a:solidFill>
+                <a:latin typeface="Calibri"/>
+              </a:rPr>
+              <a:t>The zero-shot model in blue already has the shape and sits far below the peaks. Fine-tuning on daily totals lifts it toward the observation and leaves the shape alone.</a:t>
+            </a:r>
+          </a:p>
+          <a:p>
+            <a:pPr algn="l">
+              <a:lnSpc>
+                <a:spcPct val="130000"/>
+              </a:lnSpc>
+            </a:pPr>
+            <a:r>
+              <a:rPr sz="1600" b="0">
+                <a:solidFill>
+                  <a:srgbClr val="1A1A1A"/>
+                </a:solidFill>
+                <a:latin typeface="Calibri"/>
+              </a:rPr>
+              <a:t>This is the previous slide's mechanism in a form that needs no metric.</a:t>
+            </a:r>
+          </a:p>
+        </p:txBody>
+      </p:sp>
+      <p:sp>
+        <p:nvSpPr>
+          <p:cNvPr id="6" name="TextBox 5"/>
+          <p:cNvSpPr txBox="1"/>
+          <p:nvPr/>
+        </p:nvSpPr>
+        <p:spPr>
+          <a:xfrm>
+            <a:off x="640080" y="5419343"/>
+            <a:ext cx="10881360" cy="252095"/>
+          </a:xfrm>
+          <a:prstGeom prst="rect">
+            <a:avLst/>
+          </a:prstGeom>
+          <a:noFill/>
+        </p:spPr>
+        <p:txBody>
+          <a:bodyPr wrap="square">
+            <a:spAutoFit/>
+          </a:bodyPr>
+          <a:lstStyle/>
+          <a:p>
+            <a:pPr algn="l">
+              <a:lnSpc>
+                <a:spcPct val="115000"/>
+              </a:lnSpc>
+            </a:pPr>
+            <a:r>
+              <a:rPr sz="1100" b="0">
+                <a:solidFill>
+                  <a:srgbClr val="5A5A58"/>
+                </a:solidFill>
+                <a:latin typeface="Calibri"/>
+              </a:rPr>
+              <a:t>The median and upper-quartile African catchments by fine-tuned KGE, chosen by rank rather than by eye. Neither appears anywhere in pretraining.</a:t>
+            </a:r>
+          </a:p>
+        </p:txBody>
+      </p:sp>
+    </p:spTree>
+  </p:cSld>
+  <p:clrMapOvr>
+    <a:masterClrMapping/>
+  </p:clrMapOvr>
+</p:sld>
+</file>
+
+<file path=ppt/slides/slide7.xml><?xml version="1.0" encoding="utf-8"?>
+<p:sld xmlns:a="http://schemas.openxmlformats.org/drawingml/2006/main" xmlns:p="http://schemas.openxmlformats.org/presentationml/2006/main" xmlns:r="http://schemas.openxmlformats.org/officeDocument/2006/relationships">
+  <p:cSld>
+    <p:spTree>
+      <p:nvGrpSpPr>
+        <p:cNvPr id="1" name=""/>
+        <p:cNvGrpSpPr/>
+        <p:nvPr/>
+      </p:nvGrpSpPr>
+      <p:grpSpPr/>
+      <p:sp>
+        <p:nvSpPr>
+          <p:cNvPr id="2" name="TextBox 1"/>
+          <p:cNvSpPr txBox="1"/>
+          <p:nvPr/>
+        </p:nvSpPr>
+        <p:spPr>
+          <a:xfrm>
+            <a:off x="640080" y="384048"/>
+            <a:ext cx="10881360" cy="640080"/>
+          </a:xfrm>
+          <a:prstGeom prst="rect">
+            <a:avLst/>
+          </a:prstGeom>
+          <a:noFill/>
+        </p:spPr>
+        <p:txBody>
+          <a:bodyPr wrap="square">
+            <a:spAutoFit/>
+          </a:bodyPr>
+          <a:lstStyle/>
+          <a:p>
+            <a:pPr algn="l">
+              <a:lnSpc>
+                <a:spcPct val="115000"/>
+              </a:lnSpc>
+            </a:pPr>
+            <a:r>
+              <a:rPr sz="2700" b="1">
+                <a:solidFill>
+                  <a:srgbClr val="1A1A1A"/>
+                </a:solidFill>
+                <a:latin typeface="Calibri"/>
+              </a:rPr>
+              <a:t>The blocked split, agency by agency</a:t>
+            </a:r>
+          </a:p>
+        </p:txBody>
+      </p:sp>
+      <p:sp>
+        <p:nvSpPr>
+          <p:cNvPr id="3" name="Rectangle 2"/>
+          <p:cNvSpPr/>
+          <p:nvPr/>
+        </p:nvSpPr>
+        <p:spPr>
+          <a:xfrm>
+            <a:off x="640080" y="1207008"/>
+            <a:ext cx="10908792" cy="9525"/>
+          </a:xfrm>
+          <a:prstGeom prst="rect">
+            <a:avLst/>
+          </a:prstGeom>
+          <a:solidFill>
+            <a:srgbClr val="D8D6D0"/>
+          </a:solidFill>
+          <a:ln>
+            <a:noFill/>
+          </a:ln>
+          <a:effectLst/>
+        </p:spPr>
+        <p:style>
+          <a:lnRef idx="1">
+            <a:schemeClr val="accent1"/>
+          </a:lnRef>
+          <a:fillRef idx="3">
+            <a:schemeClr val="accent1"/>
+          </a:fillRef>
+          <a:effectRef idx="2">
+            <a:schemeClr val="accent1"/>
+          </a:effectRef>
+          <a:fontRef idx="minor">
+            <a:schemeClr val="lt1"/>
+          </a:fontRef>
+        </p:style>
+        <p:txBody>
+          <a:bodyPr rtlCol="0" anchor="ctr"/>
+          <a:lstStyle/>
+          <a:p>
+            <a:pPr algn="ctr"/>
+          </a:p>
+        </p:txBody>
+      </p:sp>
+      <p:pic>
+        <p:nvPicPr>
+          <p:cNvPr id="4" name="Picture 3" descr="fig04_agency_recovery.png"/>
+          <p:cNvPicPr>
+            <a:picLocks noChangeAspect="1"/>
+          </p:cNvPicPr>
+          <p:nvPr/>
+        </p:nvPicPr>
+        <p:blipFill>
+          <a:blip r:embed="rId2"/>
+          <a:stretch>
+            <a:fillRect/>
+          </a:stretch>
+        </p:blipFill>
+        <p:spPr>
+          <a:xfrm>
+            <a:off x="2527667" y="1627632"/>
+            <a:ext cx="7136360" cy="2926080"/>
+          </a:xfrm>
+          <a:prstGeom prst="rect">
+            <a:avLst/>
+          </a:prstGeom>
+        </p:spPr>
+      </p:pic>
+      <p:sp>
+        <p:nvSpPr>
+          <p:cNvPr id="5" name="TextBox 4"/>
+          <p:cNvSpPr txBox="1"/>
+          <p:nvPr/>
+        </p:nvSpPr>
+        <p:spPr>
+          <a:xfrm>
+            <a:off x="640080" y="4754880"/>
+            <a:ext cx="10881360" cy="883920"/>
+          </a:xfrm>
+          <a:prstGeom prst="rect">
+            <a:avLst/>
+          </a:prstGeom>
+          <a:noFill/>
+        </p:spPr>
+        <p:txBody>
+          <a:bodyPr wrap="square">
+            <a:spAutoFit/>
+          </a:bodyPr>
+          <a:lstStyle/>
+          <a:p>
+            <a:pPr algn="l">
+              <a:lnSpc>
+                <a:spcPct val="130000"/>
+              </a:lnSpc>
+            </a:pPr>
+            <a:r>
+              <a:rPr sz="1600" b="1">
+                <a:solidFill>
+                  <a:srgbClr val="EB6834"/>
+                </a:solidFill>
+                <a:latin typeface="Calibri"/>
+              </a:rPr>
+              <a:t>Five of six networks recover 85 to 102 percent of what spatial blocking costs. Iceland, with 73 gauges, recovers 38 percent.</a:t>
+            </a:r>
+          </a:p>
+          <a:p>
+            <a:pPr algn="l">
+              <a:lnSpc>
+                <a:spcPct val="130000"/>
+              </a:lnSpc>
+            </a:pPr>
+            <a:r>
+              <a:rPr sz="1600" b="0">
+                <a:solidFill>
+                  <a:srgbClr val="1A1A1A"/>
+                </a:solidFill>
+                <a:latin typeface="Calibri"/>
+              </a:rPr>
+              <a:t>The method is weakest exactly where the gauge network is sparsest, which is worth stating plainly.</a:t>
+            </a:r>
+          </a:p>
+        </p:txBody>
+      </p:sp>
+      <p:sp>
+        <p:nvSpPr>
+          <p:cNvPr id="6" name="TextBox 5"/>
+          <p:cNvSpPr txBox="1"/>
+          <p:nvPr/>
+        </p:nvSpPr>
+        <p:spPr>
+          <a:xfrm>
+            <a:off x="640080" y="5693664"/>
+            <a:ext cx="10881360" cy="252095"/>
+          </a:xfrm>
+          <a:prstGeom prst="rect">
+            <a:avLst/>
+          </a:prstGeom>
+          <a:noFill/>
+        </p:spPr>
+        <p:txBody>
+          <a:bodyPr wrap="square">
+            <a:spAutoFit/>
+          </a:bodyPr>
+          <a:lstStyle/>
+          <a:p>
+            <a:pPr algn="l">
+              <a:lnSpc>
+                <a:spcPct val="115000"/>
+              </a:lnSpc>
+            </a:pPr>
+            <a:r>
+              <a:rPr sz="1100" b="0">
+                <a:solidFill>
+                  <a:srgbClr val="5A5A58"/>
+                </a:solidFill>
+                <a:latin typeface="Calibri"/>
+              </a:rPr>
+              <a:t>Blocking is 120 k-means blocks on 3-D unit vectors, packed whole into five folds, so fold sizes stay within 10 gauges of the random split's.</a:t>
+            </a:r>
+          </a:p>
+        </p:txBody>
+      </p:sp>
+    </p:spTree>
+  </p:cSld>
+  <p:clrMapOvr>
+    <a:masterClrMapping/>
+  </p:clrMapOvr>
+</p:sld>
+</file>
+
+<file path=ppt/slides/slide8.xml><?xml version="1.0" encoding="utf-8"?>
+<p:sld xmlns:a="http://schemas.openxmlformats.org/drawingml/2006/main" xmlns:p="http://schemas.openxmlformats.org/presentationml/2006/main" xmlns:r="http://schemas.openxmlformats.org/officeDocument/2006/relationships">
+  <p:cSld>
+    <p:spTree>
+      <p:nvGrpSpPr>
+        <p:cNvPr id="1" name=""/>
+        <p:cNvGrpSpPr/>
+        <p:nvPr/>
+      </p:nvGrpSpPr>
+      <p:grpSpPr/>
+      <p:sp>
+        <p:nvSpPr>
+          <p:cNvPr id="2" name="TextBox 1"/>
+          <p:cNvSpPr txBox="1"/>
+          <p:nvPr/>
+        </p:nvSpPr>
+        <p:spPr>
+          <a:xfrm>
+            <a:off x="640080" y="384048"/>
+            <a:ext cx="10881360" cy="640080"/>
+          </a:xfrm>
+          <a:prstGeom prst="rect">
+            <a:avLst/>
+          </a:prstGeom>
+          <a:noFill/>
+        </p:spPr>
+        <p:txBody>
+          <a:bodyPr wrap="square">
+            <a:spAutoFit/>
+          </a:bodyPr>
+          <a:lstStyle/>
+          <a:p>
+            <a:pPr algn="l">
+              <a:lnSpc>
+                <a:spcPct val="115000"/>
+              </a:lnSpc>
+            </a:pPr>
+            <a:r>
+              <a:rPr sz="2700" b="1">
+                <a:solidFill>
+                  <a:srgbClr val="1A1A1A"/>
+                </a:solidFill>
+                <a:latin typeface="Calibri"/>
+              </a:rPr>
+              <a:t>The cost to the source domain, and how much of it comes back</a:t>
+            </a:r>
+          </a:p>
+        </p:txBody>
+      </p:sp>
+      <p:sp>
+        <p:nvSpPr>
+          <p:cNvPr id="3" name="Rectangle 2"/>
+          <p:cNvSpPr/>
+          <p:nvPr/>
+        </p:nvSpPr>
+        <p:spPr>
+          <a:xfrm>
+            <a:off x="640080" y="1207008"/>
+            <a:ext cx="10908792" cy="9525"/>
+          </a:xfrm>
+          <a:prstGeom prst="rect">
+            <a:avLst/>
+          </a:prstGeom>
+          <a:solidFill>
+            <a:srgbClr val="D8D6D0"/>
+          </a:solidFill>
+          <a:ln>
+            <a:noFill/>
+          </a:ln>
+          <a:effectLst/>
+        </p:spPr>
+        <p:style>
+          <a:lnRef idx="1">
+            <a:schemeClr val="accent1"/>
+          </a:lnRef>
+          <a:fillRef idx="3">
+            <a:schemeClr val="accent1"/>
+          </a:fillRef>
+          <a:effectRef idx="2">
+            <a:schemeClr val="accent1"/>
+          </a:effectRef>
+          <a:fontRef idx="minor">
+            <a:schemeClr val="lt1"/>
+          </a:fontRef>
+        </p:style>
+        <p:txBody>
+          <a:bodyPr rtlCol="0" anchor="ctr"/>
+          <a:lstStyle/>
+          <a:p>
+            <a:pPr algn="ctr"/>
+          </a:p>
+        </p:txBody>
+      </p:sp>
+      <p:pic>
+        <p:nvPicPr>
           <p:cNvPr id="4" name="Picture 3" descr="fig12_replay.png"/>
           <p:cNvPicPr>
             <a:picLocks noChangeAspect="1"/>
@@ -5243,7 +5841,7 @@
 </p:sld>
 </file>
 
-<file path=ppt/slides/slide7.xml><?xml version="1.0" encoding="utf-8"?>
+<file path=ppt/slides/slide9.xml><?xml version="1.0" encoding="utf-8"?>
 <p:sld xmlns:a="http://schemas.openxmlformats.org/drawingml/2006/main" xmlns:p="http://schemas.openxmlformats.org/presentationml/2006/main" xmlns:r="http://schemas.openxmlformats.org/officeDocument/2006/relationships">
   <p:cSld>
     <p:spTree>

--- a/reports/slides/PhaseI_briefing.pptx
+++ b/reports/slides/PhaseI_briefing.pptx
@@ -14,6 +14,7 @@
     <p:sldId id="262" r:id="rId14"/>
     <p:sldId id="263" r:id="rId15"/>
     <p:sldId id="264" r:id="rId16"/>
+    <p:sldId id="265" r:id="rId17"/>
   </p:sldIdLst>
   <p:sldSz cx="12191695" cy="6858000" type="screen4x3"/>
   <p:notesSz cx="6858000" cy="9144000"/>
@@ -535,6 +536,76 @@
 </p:notes>
 </file>
 
+<file path=ppt/notesSlides/notesSlide10.xml><?xml version="1.0" encoding="utf-8"?>
+<p:notes xmlns:a="http://schemas.openxmlformats.org/drawingml/2006/main" xmlns:p="http://schemas.openxmlformats.org/presentationml/2006/main" xmlns:r="http://schemas.openxmlformats.org/officeDocument/2006/relationships">
+  <p:cSld>
+    <p:spTree>
+      <p:nvGrpSpPr>
+        <p:cNvPr id="1" name=""/>
+        <p:cNvGrpSpPr/>
+        <p:nvPr/>
+      </p:nvGrpSpPr>
+      <p:grpSpPr>
+        <a:xfrm>
+          <a:off x="0" y="0"/>
+          <a:ext cx="0" cy="0"/>
+          <a:chOff x="0" y="0"/>
+          <a:chExt cx="0" cy="0"/>
+        </a:xfrm>
+      </p:grpSpPr>
+      <p:sp>
+        <p:nvSpPr>
+          <p:cNvPr id="2" name="Slide Image Placeholder 1"/>
+          <p:cNvSpPr>
+            <a:spLocks noGrp="1"/>
+          </p:cNvSpPr>
+          <p:nvPr>
+            <p:ph type="sldImg" idx="2"/>
+          </p:nvPr>
+        </p:nvSpPr>
+        <p:spPr/>
+      </p:sp>
+      <p:sp>
+        <p:nvSpPr>
+          <p:cNvPr id="3" name="Notes Placeholder 2"/>
+          <p:cNvSpPr>
+            <a:spLocks noGrp="1"/>
+          </p:cNvSpPr>
+          <p:nvPr>
+            <p:ph type="body" idx="3" sz="quarter"/>
+          </p:nvPr>
+        </p:nvSpPr>
+        <p:spPr/>
+        <p:txBody>
+          <a:bodyPr/>
+          <a:lstStyle/>
+          <a:p>
+            <a:r>
+              <a:t>Optional next step worth mentioning: the daily arm's own best rate is 2e-4, not the 5e-4 used throughout, which would lift the headline gain from +0.058 to +0.064. Re-running the blocked, Africa and replay arms at that rate is a few hours and would make every number consistent at the better configuration.</a:t>
+            </a:r>
+          </a:p>
+        </p:txBody>
+      </p:sp>
+      <p:sp>
+        <p:nvSpPr>
+          <p:cNvPr id="4" name="Slide Number Placeholder 3"/>
+          <p:cNvSpPr>
+            <a:spLocks noGrp="1"/>
+          </p:cNvSpPr>
+          <p:nvPr>
+            <p:ph type="sldNum" idx="5" sz="quarter"/>
+          </p:nvPr>
+        </p:nvSpPr>
+        <p:spPr/>
+      </p:sp>
+    </p:spTree>
+  </p:cSld>
+  <p:clrMapOvr>
+    <a:masterClrMapping/>
+  </p:clrMapOvr>
+</p:notes>
+</file>
+
 <file path=ppt/notesSlides/notesSlide2.xml><?xml version="1.0" encoding="utf-8"?>
 <p:notes xmlns:a="http://schemas.openxmlformats.org/drawingml/2006/main" xmlns:p="http://schemas.openxmlformats.org/presentationml/2006/main" xmlns:r="http://schemas.openxmlformats.org/officeDocument/2006/relationships">
   <p:cSld>
@@ -1122,13 +1193,19 @@
           <a:lstStyle/>
           <a:p>
             <a:r>
-              <a:t>The result held back from the deck: daily-only supervision currently BEATS hourly supervision on the target domain, +0.058 against +0.033, and the difference is entirely in alpha. Daily supervision improves the under-dispersion, hourly supervision worsens it. The plausible mechanism is that the daily objective is a constrained one and the constraint regularises.</a:t>
+              <a:t>These two slides' worth of runs are what moved the claim from 'daily data is a workable substitute' to 'daily aggregate supervision is the better transfer signal'. Both objections are the reader's natural next thought, and neither is answerable by argument.</a:t>
             </a:r>
           </a:p>
           <a:p/>
           <a:p>
             <a:r>
-              <a:t>It is not on a slide because the hyperparameters were tuned for the daily arm and the sweep that rules out a misconfigured hourly arm has not finished. Mention it verbally as preliminary if asked what surprised you.</a:t>
+              <a:t>Remaining caveat, state it if asked: hyperparameters other than the learning rate were inherited from the daily configuration.</a:t>
+            </a:r>
+          </a:p>
+          <a:p/>
+          <a:p>
+            <a:r>
+              <a:t>The plausible mechanism for the second result is that the daily objective is a constrained one, weighting the aggregate term at 0.5 and leaving the hourly branch frozen, and the constraint regularises.</a:t>
             </a:r>
           </a:p>
         </p:txBody>
@@ -4291,7 +4368,7 @@
 </p:sld>
 </file>
 
-<file path=ppt/slides/slide2.xml><?xml version="1.0" encoding="utf-8"?>
+<file path=ppt/slides/slide10.xml><?xml version="1.0" encoding="utf-8"?>
 <p:sld xmlns:a="http://schemas.openxmlformats.org/drawingml/2006/main" xmlns:p="http://schemas.openxmlformats.org/presentationml/2006/main" xmlns:r="http://schemas.openxmlformats.org/officeDocument/2006/relationships">
   <p:cSld>
     <p:spTree>
@@ -4335,7 +4412,7 @@
                 </a:solidFill>
                 <a:latin typeface="Calibri"/>
               </a:rPr>
-              <a:t>The problem is coverage, not accuracy</a:t>
+              <a:t>Where this stands</a:t>
             </a:r>
           </a:p>
         </p:txBody>
@@ -4412,13 +4489,13 @@
               </a:lnSpc>
             </a:pPr>
             <a:r>
-              <a:rPr sz="1800" b="0">
+              <a:rPr sz="1500" b="0">
                 <a:solidFill>
                   <a:srgbClr val="1A1A1A"/>
                 </a:solidFill>
                 <a:latin typeface="Calibri"/>
               </a:rPr>
-              <a:t>Flood forecasting needs hourly resolution. Hourly discharge records do not exist in most of the world.</a:t>
+              <a:t>Settled</a:t>
             </a:r>
           </a:p>
           <a:p>
@@ -4428,13 +4505,13 @@
               </a:lnSpc>
             </a:pPr>
             <a:r>
-              <a:rPr sz="1800" b="0">
+              <a:rPr sz="1500" b="0">
                 <a:solidFill>
                   <a:srgbClr val="1A1A1A"/>
                 </a:solidFill>
                 <a:latin typeface="Calibri"/>
               </a:rPr>
-              <a:t/>
+              <a:t>  Five-fold cross-validation on 8,843 gauges, six agencies</a:t>
             </a:r>
           </a:p>
           <a:p>
@@ -4444,13 +4521,13 @@
               </a:lnSpc>
             </a:pPr>
             <a:r>
-              <a:rPr sz="1800" b="1">
-                <a:solidFill>
-                  <a:srgbClr val="EB6834"/>
+              <a:rPr sz="1500" b="0">
+                <a:solidFill>
+                  <a:srgbClr val="1A1A1A"/>
                 </a:solidFill>
                 <a:latin typeface="Calibri"/>
               </a:rPr>
-              <a:t>CAMELSH alone contributes 5,767 US gauges. All 282 African basins tested here have zero hourly discharge.</a:t>
+              <a:t>  Spatially blocked split, 10.4 km to 94.9 km nearest trainable neighbour</a:t>
             </a:r>
           </a:p>
           <a:p>
@@ -4460,13 +4537,13 @@
               </a:lnSpc>
             </a:pPr>
             <a:r>
-              <a:rPr sz="1800" b="0">
+              <a:rPr sz="1500" b="0">
                 <a:solidFill>
                   <a:srgbClr val="1A1A1A"/>
                 </a:solidFill>
                 <a:latin typeface="Calibri"/>
               </a:rPr>
-              <a:t/>
+              <a:t>  External test on 282 African basins, none seen in training</a:t>
             </a:r>
           </a:p>
           <a:p>
@@ -4476,13 +4553,13 @@
               </a:lnSpc>
             </a:pPr>
             <a:r>
-              <a:rPr sz="1800" b="0">
+              <a:rPr sz="1500" b="0">
                 <a:solidFill>
                   <a:srgbClr val="1A1A1A"/>
                 </a:solidFill>
                 <a:latin typeface="Calibri"/>
               </a:rPr>
-              <a:t>If an hourly model needs hourly data to adapt, it can never reach the regions that need it most.</a:t>
+              <a:t>  Single-variable ablation, all five folds:</a:t>
             </a:r>
           </a:p>
           <a:p>
@@ -4492,13 +4569,13 @@
               </a:lnSpc>
             </a:pPr>
             <a:r>
-              <a:rPr sz="1800" b="0">
+              <a:rPr sz="1500" b="0">
                 <a:solidFill>
                   <a:srgbClr val="1A1A1A"/>
                 </a:solidFill>
                 <a:latin typeface="Calibri"/>
               </a:rPr>
-              <a:t/>
+              <a:t>  forget gate 0 -&gt; 3: +0.0176 (sd 0.0086, 5 folds)</a:t>
             </a:r>
           </a:p>
           <a:p>
@@ -4508,13 +4585,125 @@
               </a:lnSpc>
             </a:pPr>
             <a:r>
-              <a:rPr sz="1800" b="0">
+              <a:rPr sz="1500" b="0">
                 <a:solidFill>
                   <a:srgbClr val="1A1A1A"/>
                 </a:solidFill>
                 <a:latin typeface="Calibri"/>
               </a:rPr>
-              <a:t>Phase I asks whether daily observations, which most of the world does have, are enough to adapt one.</a:t>
+              <a:t>  hourly look-back 72 -&gt; 336: +0.0581 (sd 0.0313, 5 folds)</a:t>
+            </a:r>
+          </a:p>
+          <a:p>
+            <a:pPr algn="l">
+              <a:lnSpc>
+                <a:spcPct val="145000"/>
+              </a:lnSpc>
+            </a:pPr>
+            <a:r>
+              <a:rPr sz="1500" b="0">
+                <a:solidFill>
+                  <a:srgbClr val="1A1A1A"/>
+                </a:solidFill>
+                <a:latin typeface="Calibri"/>
+              </a:rPr>
+              <a:t>  Rescaling control and hourly-supervision reference arms, five folds each</a:t>
+            </a:r>
+          </a:p>
+          <a:p>
+            <a:pPr algn="l">
+              <a:lnSpc>
+                <a:spcPct val="145000"/>
+              </a:lnSpc>
+            </a:pPr>
+            <a:r>
+              <a:rPr sz="1500" b="0">
+                <a:solidFill>
+                  <a:srgbClr val="1A1A1A"/>
+                </a:solidFill>
+                <a:latin typeface="Calibri"/>
+              </a:rPr>
+              <a:t/>
+            </a:r>
+          </a:p>
+          <a:p>
+            <a:pPr algn="l">
+              <a:lnSpc>
+                <a:spcPct val="145000"/>
+              </a:lnSpc>
+            </a:pPr>
+            <a:r>
+              <a:rPr sz="1500" b="0">
+                <a:solidFill>
+                  <a:srgbClr val="1A1A1A"/>
+                </a:solidFill>
+                <a:latin typeface="Calibri"/>
+              </a:rPr>
+              <a:t>Scope, stated rather than defended</a:t>
+            </a:r>
+          </a:p>
+          <a:p>
+            <a:pPr algn="l">
+              <a:lnSpc>
+                <a:spcPct val="145000"/>
+              </a:lnSpc>
+            </a:pPr>
+            <a:r>
+              <a:rPr sz="1500" b="0">
+                <a:solidFill>
+                  <a:srgbClr val="1A1A1A"/>
+                </a:solidFill>
+                <a:latin typeface="Calibri"/>
+              </a:rPr>
+              <a:t>  Catchments to 10,000 km2, median 363. Large basins untested, and the forcing reaches the model as catchment-mean scalars, so routing is not learnable from it.</a:t>
+            </a:r>
+          </a:p>
+          <a:p>
+            <a:pPr algn="l">
+              <a:lnSpc>
+                <a:spcPct val="145000"/>
+              </a:lnSpc>
+            </a:pPr>
+            <a:r>
+              <a:rPr sz="1500" b="0">
+                <a:solidFill>
+                  <a:srgbClr val="1A1A1A"/>
+                </a:solidFill>
+                <a:latin typeface="Calibri"/>
+              </a:rPr>
+              <a:t>  Six of seven available networks; the Czech 437 gauges sit inside the retained attribute range on every compared property.</a:t>
+            </a:r>
+          </a:p>
+          <a:p>
+            <a:pPr algn="l">
+              <a:lnSpc>
+                <a:spcPct val="145000"/>
+              </a:lnSpc>
+            </a:pPr>
+            <a:r>
+              <a:rPr sz="1500" b="0">
+                <a:solidFill>
+                  <a:srgbClr val="1A1A1A"/>
+                </a:solidFill>
+                <a:latin typeface="Calibri"/>
+              </a:rPr>
+              <a:t/>
+            </a:r>
+          </a:p>
+          <a:p>
+            <a:pPr algn="l">
+              <a:lnSpc>
+                <a:spcPct val="145000"/>
+              </a:lnSpc>
+            </a:pPr>
+            <a:r>
+              <a:rPr sz="1500" b="1">
+                <a:solidFill>
+                  <a:srgbClr val="EB6834"/>
+                </a:solidFill>
+                <a:latin typeface="Calibri"/>
+              </a:rPr>
+              <a:t>Publication: the two controls above answer the objections that would have forced a smaller claim. The result is a methodological one now, not only an application.</a:t>
             </a:r>
           </a:p>
         </p:txBody>
@@ -4527,7 +4716,7 @@
 </p:sld>
 </file>
 
-<file path=ppt/slides/slide3.xml><?xml version="1.0" encoding="utf-8"?>
+<file path=ppt/slides/slide2.xml><?xml version="1.0" encoding="utf-8"?>
 <p:sld xmlns:a="http://schemas.openxmlformats.org/drawingml/2006/main" xmlns:p="http://schemas.openxmlformats.org/presentationml/2006/main" xmlns:r="http://schemas.openxmlformats.org/officeDocument/2006/relationships">
   <p:cSld>
     <p:spTree>
@@ -4571,7 +4760,7 @@
                 </a:solidFill>
                 <a:latin typeface="Calibri"/>
               </a:rPr>
-              <a:t>The result: the harder the test, the more daily data helps</a:t>
+              <a:t>The problem is coverage, not accuracy</a:t>
             </a:r>
           </a:p>
         </p:txBody>
@@ -4620,40 +4809,16 @@
           </a:p>
         </p:txBody>
       </p:sp>
-      <p:pic>
-        <p:nvPicPr>
-          <p:cNvPr id="4" name="Picture 3" descr="fig13_headline.png"/>
-          <p:cNvPicPr>
-            <a:picLocks noChangeAspect="1"/>
-          </p:cNvPicPr>
+      <p:sp>
+        <p:nvSpPr>
+          <p:cNvPr id="4" name="TextBox 3"/>
+          <p:cNvSpPr txBox="1"/>
           <p:nvPr/>
-        </p:nvPicPr>
-        <p:blipFill>
-          <a:blip r:embed="rId2"/>
-          <a:stretch>
-            <a:fillRect/>
-          </a:stretch>
-        </p:blipFill>
+        </p:nvSpPr>
         <p:spPr>
           <a:xfrm>
-            <a:off x="3105310" y="1627632"/>
-            <a:ext cx="5981075" cy="3200400"/>
-          </a:xfrm>
-          <a:prstGeom prst="rect">
-            <a:avLst/>
-          </a:prstGeom>
-        </p:spPr>
-      </p:pic>
-      <p:sp>
-        <p:nvSpPr>
-          <p:cNvPr id="5" name="TextBox 4"/>
-          <p:cNvSpPr txBox="1"/>
-          <p:nvPr/>
-        </p:nvSpPr>
-        <p:spPr>
-          <a:xfrm>
-            <a:off x="640080" y="5029200"/>
-            <a:ext cx="10881360" cy="1148080"/>
+            <a:off x="640080" y="1600200"/>
+            <a:ext cx="10881360" cy="4754880"/>
           </a:xfrm>
           <a:prstGeom prst="rect">
             <a:avLst/>
@@ -4668,72 +4833,113 @@
           <a:p>
             <a:pPr algn="l">
               <a:lnSpc>
-                <a:spcPct val="130000"/>
+                <a:spcPct val="145000"/>
               </a:lnSpc>
             </a:pPr>
             <a:r>
-              <a:rPr sz="1600" b="1">
-                <a:solidFill>
-                  <a:srgbClr val="EB6834"/>
+              <a:rPr sz="1800" b="0">
+                <a:solidFill>
+                  <a:srgbClr val="1A1A1A"/>
                 </a:solidFill>
                 <a:latin typeface="Calibri"/>
               </a:rPr>
-              <a:t>The gain grows from +0.062 to +0.133 to +0.409 as the test gets harder, while the two temperate endpoints land 0.004 apart.</a:t>
+              <a:t>Flood forecasting needs hourly resolution. Hourly discharge records do not exist in most of the world.</a:t>
             </a:r>
           </a:p>
           <a:p>
             <a:pPr algn="l">
               <a:lnSpc>
-                <a:spcPct val="130000"/>
+                <a:spcPct val="145000"/>
               </a:lnSpc>
             </a:pPr>
             <a:r>
-              <a:rPr sz="1600" b="0">
+              <a:rPr sz="1800" b="0">
                 <a:solidFill>
                   <a:srgbClr val="1A1A1A"/>
                 </a:solidFill>
                 <a:latin typeface="Calibri"/>
               </a:rPr>
-              <a:t>The zero-shot baseline's apparent skill was partly spatial proximity. The gain from daily data was not.</a:t>
-            </a:r>
-          </a:p>
-        </p:txBody>
-      </p:sp>
-      <p:sp>
-        <p:nvSpPr>
-          <p:cNvPr id="6" name="TextBox 5"/>
-          <p:cNvSpPr txBox="1"/>
-          <p:nvPr/>
-        </p:nvSpPr>
-        <p:spPr>
-          <a:xfrm>
-            <a:off x="640080" y="6232144"/>
-            <a:ext cx="10881360" cy="412749"/>
-          </a:xfrm>
-          <a:prstGeom prst="rect">
-            <a:avLst/>
-          </a:prstGeom>
-          <a:noFill/>
-        </p:spPr>
-        <p:txBody>
-          <a:bodyPr wrap="square">
-            <a:spAutoFit/>
-          </a:bodyPr>
-          <a:lstStyle/>
+              <a:t/>
+            </a:r>
+          </a:p>
           <a:p>
             <a:pPr algn="l">
               <a:lnSpc>
-                <a:spcPct val="115000"/>
+                <a:spcPct val="145000"/>
               </a:lnSpc>
             </a:pPr>
             <a:r>
-              <a:rPr sz="1100" b="0">
-                <a:solidFill>
-                  <a:srgbClr val="5A5A58"/>
+              <a:rPr sz="1800" b="1">
+                <a:solidFill>
+                  <a:srgbClr val="EB6834"/>
                 </a:solidFill>
                 <a:latin typeface="Calibri"/>
               </a:rPr>
-              <a:t>Fine-tuning uses 24-hour aggregates only. The target stations' hourly observations are hidden from the loss and from epoch selection, and used solely for scoring.</a:t>
+              <a:t>CAMELSH alone contributes 5,767 US gauges. All 282 African basins tested here have zero hourly discharge.</a:t>
+            </a:r>
+          </a:p>
+          <a:p>
+            <a:pPr algn="l">
+              <a:lnSpc>
+                <a:spcPct val="145000"/>
+              </a:lnSpc>
+            </a:pPr>
+            <a:r>
+              <a:rPr sz="1800" b="0">
+                <a:solidFill>
+                  <a:srgbClr val="1A1A1A"/>
+                </a:solidFill>
+                <a:latin typeface="Calibri"/>
+              </a:rPr>
+              <a:t/>
+            </a:r>
+          </a:p>
+          <a:p>
+            <a:pPr algn="l">
+              <a:lnSpc>
+                <a:spcPct val="145000"/>
+              </a:lnSpc>
+            </a:pPr>
+            <a:r>
+              <a:rPr sz="1800" b="0">
+                <a:solidFill>
+                  <a:srgbClr val="1A1A1A"/>
+                </a:solidFill>
+                <a:latin typeface="Calibri"/>
+              </a:rPr>
+              <a:t>If an hourly model needs hourly data to adapt, it can never reach the regions that need it most.</a:t>
+            </a:r>
+          </a:p>
+          <a:p>
+            <a:pPr algn="l">
+              <a:lnSpc>
+                <a:spcPct val="145000"/>
+              </a:lnSpc>
+            </a:pPr>
+            <a:r>
+              <a:rPr sz="1800" b="0">
+                <a:solidFill>
+                  <a:srgbClr val="1A1A1A"/>
+                </a:solidFill>
+                <a:latin typeface="Calibri"/>
+              </a:rPr>
+              <a:t/>
+            </a:r>
+          </a:p>
+          <a:p>
+            <a:pPr algn="l">
+              <a:lnSpc>
+                <a:spcPct val="145000"/>
+              </a:lnSpc>
+            </a:pPr>
+            <a:r>
+              <a:rPr sz="1800" b="0">
+                <a:solidFill>
+                  <a:srgbClr val="1A1A1A"/>
+                </a:solidFill>
+                <a:latin typeface="Calibri"/>
+              </a:rPr>
+              <a:t>Phase I asks whether daily observations, which most of the world does have, are enough to adapt one.</a:t>
             </a:r>
           </a:p>
         </p:txBody>
@@ -4746,7 +4952,7 @@
 </p:sld>
 </file>
 
-<file path=ppt/slides/slide4.xml><?xml version="1.0" encoding="utf-8"?>
+<file path=ppt/slides/slide3.xml><?xml version="1.0" encoding="utf-8"?>
 <p:sld xmlns:a="http://schemas.openxmlformats.org/drawingml/2006/main" xmlns:p="http://schemas.openxmlformats.org/presentationml/2006/main" xmlns:r="http://schemas.openxmlformats.org/officeDocument/2006/relationships">
   <p:cSld>
     <p:spTree>
@@ -4790,7 +4996,7 @@
                 </a:solidFill>
                 <a:latin typeface="Calibri"/>
               </a:rPr>
-              <a:t>The same result, seen rather than tabulated</a:t>
+              <a:t>The result: the harder the test, the more daily data helps</a:t>
             </a:r>
           </a:p>
         </p:txBody>
@@ -4841,7 +5047,7 @@
       </p:sp>
       <p:pic>
         <p:nvPicPr>
-          <p:cNvPr id="4" name="Picture 3" descr="fig15_slide_map.png"/>
+          <p:cNvPr id="4" name="Picture 3" descr="fig13_headline.png"/>
           <p:cNvPicPr>
             <a:picLocks noChangeAspect="1"/>
           </p:cNvPicPr>
@@ -4855,8 +5061,8 @@
         </p:blipFill>
         <p:spPr>
           <a:xfrm>
-            <a:off x="1825426" y="1627632"/>
-            <a:ext cx="8540842" cy="2286000"/>
+            <a:off x="3105310" y="1627632"/>
+            <a:ext cx="5981075" cy="3200400"/>
           </a:xfrm>
           <a:prstGeom prst="rect">
             <a:avLst/>
@@ -4871,8 +5077,8 @@
         </p:nvSpPr>
         <p:spPr>
           <a:xfrm>
-            <a:off x="640080" y="4114800"/>
-            <a:ext cx="10881360" cy="883920"/>
+            <a:off x="640080" y="5029200"/>
+            <a:ext cx="10881360" cy="1148080"/>
           </a:xfrm>
           <a:prstGeom prst="rect">
             <a:avLst/>
@@ -4897,7 +5103,7 @@
                 </a:solidFill>
                 <a:latin typeface="Calibri"/>
               </a:rPr>
-              <a:t>Panel (b) is greener almost everywhere, across four continents and six national networks.</a:t>
+              <a:t>The gain grows from +0.062 to +0.133 to +0.409 as the test gets harder, while the two temperate endpoints land 0.004 apart.</a:t>
             </a:r>
           </a:p>
           <a:p>
@@ -4913,7 +5119,7 @@
                 </a:solidFill>
                 <a:latin typeface="Calibri"/>
               </a:rPr>
-              <a:t>A median cannot show that the result belongs to no single region. The African basins are the larger markers.</a:t>
+              <a:t>The zero-shot baseline's apparent skill was partly spatial proximity. The gain from daily data was not.</a:t>
             </a:r>
           </a:p>
         </p:txBody>
@@ -4926,8 +5132,8 @@
         </p:nvSpPr>
         <p:spPr>
           <a:xfrm>
-            <a:off x="640080" y="5053584"/>
-            <a:ext cx="10881360" cy="252095"/>
+            <a:off x="640080" y="6232144"/>
+            <a:ext cx="10881360" cy="412749"/>
           </a:xfrm>
           <a:prstGeom prst="rect">
             <a:avLst/>
@@ -4952,7 +5158,7 @@
                 </a:solidFill>
                 <a:latin typeface="Calibri"/>
               </a:rPr>
-              <a:t>Both panels share one colour scale, so they are read against each other by construction. Coastlines and national borders at 110 m resolution.</a:t>
+              <a:t>Fine-tuning uses 24-hour aggregates only. The target stations' hourly observations are hidden from the loss and from epoch selection, and used solely for scoring.</a:t>
             </a:r>
           </a:p>
         </p:txBody>
@@ -4965,7 +5171,7 @@
 </p:sld>
 </file>
 
-<file path=ppt/slides/slide5.xml><?xml version="1.0" encoding="utf-8"?>
+<file path=ppt/slides/slide4.xml><?xml version="1.0" encoding="utf-8"?>
 <p:sld xmlns:a="http://schemas.openxmlformats.org/drawingml/2006/main" xmlns:p="http://schemas.openxmlformats.org/presentationml/2006/main" xmlns:r="http://schemas.openxmlformats.org/officeDocument/2006/relationships">
   <p:cSld>
     <p:spTree>
@@ -5009,7 +5215,7 @@
                 </a:solidFill>
                 <a:latin typeface="Calibri"/>
               </a:rPr>
-              <a:t>Why it works, and what it cannot do</a:t>
+              <a:t>The same result, seen rather than tabulated</a:t>
             </a:r>
           </a:p>
         </p:txBody>
@@ -5060,7 +5266,7 @@
       </p:sp>
       <p:pic>
         <p:nvPicPr>
-          <p:cNvPr id="4" name="Picture 3" descr="fig11_component_deficits.png"/>
+          <p:cNvPr id="4" name="Picture 3" descr="fig15_slide_map.png"/>
           <p:cNvPicPr>
             <a:picLocks noChangeAspect="1"/>
           </p:cNvPicPr>
@@ -5074,8 +5280,8 @@
         </p:blipFill>
         <p:spPr>
           <a:xfrm>
-            <a:off x="1977584" y="1627632"/>
-            <a:ext cx="8236527" cy="2743200"/>
+            <a:off x="1825426" y="1627632"/>
+            <a:ext cx="8540842" cy="2286000"/>
           </a:xfrm>
           <a:prstGeom prst="rect">
             <a:avLst/>
@@ -5090,8 +5296,8 @@
         </p:nvSpPr>
         <p:spPr>
           <a:xfrm>
-            <a:off x="640080" y="4572000"/>
-            <a:ext cx="10881360" cy="1148080"/>
+            <a:off x="640080" y="4114800"/>
+            <a:ext cx="10881360" cy="883920"/>
           </a:xfrm>
           <a:prstGeom prst="rect">
             <a:avLst/>
@@ -5110,13 +5316,13 @@
               </a:lnSpc>
             </a:pPr>
             <a:r>
-              <a:rPr sz="1600" b="0">
-                <a:solidFill>
-                  <a:srgbClr val="1A1A1A"/>
+              <a:rPr sz="1600" b="1">
+                <a:solidFill>
+                  <a:srgbClr val="EB6834"/>
                 </a:solidFill>
                 <a:latin typeface="Calibri"/>
               </a:rPr>
-              <a:t>A 24-hour total carries magnitude information and no sub-daily timing information, so it should repair amplitude and volume and leave timing alone.</a:t>
+              <a:t>Panel (b) is greener almost everywhere, across four continents and six national networks.</a:t>
             </a:r>
           </a:p>
           <a:p>
@@ -5126,13 +5332,13 @@
               </a:lnSpc>
             </a:pPr>
             <a:r>
-              <a:rPr sz="1600" b="1">
-                <a:solidFill>
-                  <a:srgbClr val="EB6834"/>
+              <a:rPr sz="1600" b="0">
+                <a:solidFill>
+                  <a:srgbClr val="1A1A1A"/>
                 </a:solidFill>
                 <a:latin typeface="Calibri"/>
               </a:rPr>
-              <a:t>It does. Temperate: 25% of the magnitude deficit against 7% of the timing deficit. Africa: 72% against 32%.</a:t>
+              <a:t>A median cannot show that the result belongs to no single region. The African basins are the larger markers.</a:t>
             </a:r>
           </a:p>
         </p:txBody>
@@ -5145,7 +5351,7 @@
         </p:nvSpPr>
         <p:spPr>
           <a:xfrm>
-            <a:off x="640080" y="5774944"/>
+            <a:off x="640080" y="5053584"/>
             <a:ext cx="10881360" cy="252095"/>
           </a:xfrm>
           <a:prstGeom prst="rect">
@@ -5171,7 +5377,7 @@
                 </a:solidFill>
                 <a:latin typeface="Calibri"/>
               </a:rPr>
-              <a:t>Deficit is 1 - r for the correlation and |log2 x| for the two ratios, so only the fraction removed is comparable across components.</a:t>
+              <a:t>Both panels share one colour scale, so they are read against each other by construction. Coastlines and national borders at 110 m resolution.</a:t>
             </a:r>
           </a:p>
         </p:txBody>
@@ -5184,7 +5390,7 @@
 </p:sld>
 </file>
 
-<file path=ppt/slides/slide6.xml><?xml version="1.0" encoding="utf-8"?>
+<file path=ppt/slides/slide5.xml><?xml version="1.0" encoding="utf-8"?>
 <p:sld xmlns:a="http://schemas.openxmlformats.org/drawingml/2006/main" xmlns:p="http://schemas.openxmlformats.org/presentationml/2006/main" xmlns:r="http://schemas.openxmlformats.org/officeDocument/2006/relationships">
   <p:cSld>
     <p:spTree>
@@ -5228,7 +5434,7 @@
                 </a:solidFill>
                 <a:latin typeface="Calibri"/>
               </a:rPr>
-              <a:t>What the repair looks like in a single catchment</a:t>
+              <a:t>Why it works, and what it cannot do</a:t>
             </a:r>
           </a:p>
         </p:txBody>
@@ -5279,7 +5485,7 @@
       </p:sp>
       <p:pic>
         <p:nvPicPr>
-          <p:cNvPr id="4" name="Picture 3" descr="fig14_slide_hydrograph.png"/>
+          <p:cNvPr id="4" name="Picture 3" descr="fig11_component_deficits.png"/>
           <p:cNvPicPr>
             <a:picLocks noChangeAspect="1"/>
           </p:cNvPicPr>
@@ -5293,8 +5499,8 @@
         </p:blipFill>
         <p:spPr>
           <a:xfrm>
-            <a:off x="3147651" y="1627632"/>
-            <a:ext cx="5896393" cy="2651760"/>
+            <a:off x="1977584" y="1627632"/>
+            <a:ext cx="8236527" cy="2743200"/>
           </a:xfrm>
           <a:prstGeom prst="rect">
             <a:avLst/>
@@ -5309,8 +5515,8 @@
         </p:nvSpPr>
         <p:spPr>
           <a:xfrm>
-            <a:off x="640080" y="4480559"/>
-            <a:ext cx="10881360" cy="883920"/>
+            <a:off x="640080" y="4572000"/>
+            <a:ext cx="10881360" cy="1148080"/>
           </a:xfrm>
           <a:prstGeom prst="rect">
             <a:avLst/>
@@ -5329,13 +5535,13 @@
               </a:lnSpc>
             </a:pPr>
             <a:r>
-              <a:rPr sz="1600" b="1">
-                <a:solidFill>
-                  <a:srgbClr val="EB6834"/>
+              <a:rPr sz="1600" b="0">
+                <a:solidFill>
+                  <a:srgbClr val="1A1A1A"/>
                 </a:solidFill>
                 <a:latin typeface="Calibri"/>
               </a:rPr>
-              <a:t>The zero-shot model in blue already has the shape and sits far below the peaks. Fine-tuning on daily totals lifts it toward the observation and leaves the shape alone.</a:t>
+              <a:t>A 24-hour total carries magnitude information and no sub-daily timing information, so it should repair amplitude and volume and leave timing alone.</a:t>
             </a:r>
           </a:p>
           <a:p>
@@ -5345,13 +5551,13 @@
               </a:lnSpc>
             </a:pPr>
             <a:r>
-              <a:rPr sz="1600" b="0">
-                <a:solidFill>
-                  <a:srgbClr val="1A1A1A"/>
+              <a:rPr sz="1600" b="1">
+                <a:solidFill>
+                  <a:srgbClr val="EB6834"/>
                 </a:solidFill>
                 <a:latin typeface="Calibri"/>
               </a:rPr>
-              <a:t>This is the previous slide's mechanism in a form that needs no metric.</a:t>
+              <a:t>It does. Temperate: 25% of the magnitude deficit against 7% of the timing deficit. Africa: 72% against 32%.</a:t>
             </a:r>
           </a:p>
         </p:txBody>
@@ -5364,7 +5570,7 @@
         </p:nvSpPr>
         <p:spPr>
           <a:xfrm>
-            <a:off x="640080" y="5419343"/>
+            <a:off x="640080" y="5774944"/>
             <a:ext cx="10881360" cy="252095"/>
           </a:xfrm>
           <a:prstGeom prst="rect">
@@ -5390,7 +5596,7 @@
                 </a:solidFill>
                 <a:latin typeface="Calibri"/>
               </a:rPr>
-              <a:t>The median and upper-quartile African catchments by fine-tuned KGE, chosen by rank rather than by eye. Neither appears anywhere in pretraining.</a:t>
+              <a:t>Deficit is 1 - r for the correlation and |log2 x| for the two ratios, so only the fraction removed is comparable across components.</a:t>
             </a:r>
           </a:p>
         </p:txBody>
@@ -5403,7 +5609,7 @@
 </p:sld>
 </file>
 
-<file path=ppt/slides/slide7.xml><?xml version="1.0" encoding="utf-8"?>
+<file path=ppt/slides/slide6.xml><?xml version="1.0" encoding="utf-8"?>
 <p:sld xmlns:a="http://schemas.openxmlformats.org/drawingml/2006/main" xmlns:p="http://schemas.openxmlformats.org/presentationml/2006/main" xmlns:r="http://schemas.openxmlformats.org/officeDocument/2006/relationships">
   <p:cSld>
     <p:spTree>
@@ -5447,7 +5653,7 @@
                 </a:solidFill>
                 <a:latin typeface="Calibri"/>
               </a:rPr>
-              <a:t>The blocked split, agency by agency</a:t>
+              <a:t>What the repair looks like in a single catchment</a:t>
             </a:r>
           </a:p>
         </p:txBody>
@@ -5498,7 +5704,7 @@
       </p:sp>
       <p:pic>
         <p:nvPicPr>
-          <p:cNvPr id="4" name="Picture 3" descr="fig04_agency_recovery.png"/>
+          <p:cNvPr id="4" name="Picture 3" descr="fig14_slide_hydrograph.png"/>
           <p:cNvPicPr>
             <a:picLocks noChangeAspect="1"/>
           </p:cNvPicPr>
@@ -5512,8 +5718,8 @@
         </p:blipFill>
         <p:spPr>
           <a:xfrm>
-            <a:off x="2527667" y="1627632"/>
-            <a:ext cx="7136360" cy="2926080"/>
+            <a:off x="3147651" y="1627632"/>
+            <a:ext cx="5896393" cy="2651760"/>
           </a:xfrm>
           <a:prstGeom prst="rect">
             <a:avLst/>
@@ -5528,7 +5734,7 @@
         </p:nvSpPr>
         <p:spPr>
           <a:xfrm>
-            <a:off x="640080" y="4754880"/>
+            <a:off x="640080" y="4480559"/>
             <a:ext cx="10881360" cy="883920"/>
           </a:xfrm>
           <a:prstGeom prst="rect">
@@ -5554,7 +5760,7 @@
                 </a:solidFill>
                 <a:latin typeface="Calibri"/>
               </a:rPr>
-              <a:t>Five of six networks recover 85 to 102 percent of what spatial blocking costs. Iceland, with 73 gauges, recovers 38 percent.</a:t>
+              <a:t>The zero-shot model in blue already has the shape and sits far below the peaks. Fine-tuning on daily totals lifts it toward the observation and leaves the shape alone.</a:t>
             </a:r>
           </a:p>
           <a:p>
@@ -5570,7 +5776,7 @@
                 </a:solidFill>
                 <a:latin typeface="Calibri"/>
               </a:rPr>
-              <a:t>The method is weakest exactly where the gauge network is sparsest, which is worth stating plainly.</a:t>
+              <a:t>This is the previous slide's mechanism in a form that needs no metric.</a:t>
             </a:r>
           </a:p>
         </p:txBody>
@@ -5583,7 +5789,7 @@
         </p:nvSpPr>
         <p:spPr>
           <a:xfrm>
-            <a:off x="640080" y="5693664"/>
+            <a:off x="640080" y="5419343"/>
             <a:ext cx="10881360" cy="252095"/>
           </a:xfrm>
           <a:prstGeom prst="rect">
@@ -5609,7 +5815,7 @@
                 </a:solidFill>
                 <a:latin typeface="Calibri"/>
               </a:rPr>
-              <a:t>Blocking is 120 k-means blocks on 3-D unit vectors, packed whole into five folds, so fold sizes stay within 10 gauges of the random split's.</a:t>
+              <a:t>The median and upper-quartile African catchments by fine-tuned KGE, chosen by rank rather than by eye. Neither appears anywhere in pretraining.</a:t>
             </a:r>
           </a:p>
         </p:txBody>
@@ -5622,7 +5828,7 @@
 </p:sld>
 </file>
 
-<file path=ppt/slides/slide8.xml><?xml version="1.0" encoding="utf-8"?>
+<file path=ppt/slides/slide7.xml><?xml version="1.0" encoding="utf-8"?>
 <p:sld xmlns:a="http://schemas.openxmlformats.org/drawingml/2006/main" xmlns:p="http://schemas.openxmlformats.org/presentationml/2006/main" xmlns:r="http://schemas.openxmlformats.org/officeDocument/2006/relationships">
   <p:cSld>
     <p:spTree>
@@ -5666,7 +5872,7 @@
                 </a:solidFill>
                 <a:latin typeface="Calibri"/>
               </a:rPr>
-              <a:t>The cost to the source domain, and how much of it comes back</a:t>
+              <a:t>The blocked split, agency by agency</a:t>
             </a:r>
           </a:p>
         </p:txBody>
@@ -5717,7 +5923,7 @@
       </p:sp>
       <p:pic>
         <p:nvPicPr>
-          <p:cNvPr id="4" name="Picture 3" descr="fig12_replay.png"/>
+          <p:cNvPr id="4" name="Picture 3" descr="fig04_agency_recovery.png"/>
           <p:cNvPicPr>
             <a:picLocks noChangeAspect="1"/>
           </p:cNvPicPr>
@@ -5731,8 +5937,8 @@
         </p:blipFill>
         <p:spPr>
           <a:xfrm>
-            <a:off x="2617294" y="1627632"/>
-            <a:ext cx="6957107" cy="2834640"/>
+            <a:off x="2527667" y="1627632"/>
+            <a:ext cx="7136360" cy="2926080"/>
           </a:xfrm>
           <a:prstGeom prst="rect">
             <a:avLst/>
@@ -5747,8 +5953,8 @@
         </p:nvSpPr>
         <p:spPr>
           <a:xfrm>
-            <a:off x="640080" y="4663440"/>
-            <a:ext cx="10881360" cy="1148080"/>
+            <a:off x="640080" y="4754880"/>
+            <a:ext cx="10881360" cy="883920"/>
           </a:xfrm>
           <a:prstGeom prst="rect">
             <a:avLst/>
@@ -5767,13 +5973,13 @@
               </a:lnSpc>
             </a:pPr>
             <a:r>
-              <a:rPr sz="1600" b="0">
-                <a:solidFill>
-                  <a:srgbClr val="1A1A1A"/>
+              <a:rPr sz="1600" b="1">
+                <a:solidFill>
+                  <a:srgbClr val="EB6834"/>
                 </a:solidFill>
                 <a:latin typeface="Calibri"/>
               </a:rPr>
-              <a:t>Adapting to the daily domain degrades the hourly one: the median source gauge loses 0.054 KGE, in every fold.</a:t>
+              <a:t>Five of six networks recover 85 to 102 percent of what spatial blocking costs. Iceland, with 73 gauges, recovers 38 percent.</a:t>
             </a:r>
           </a:p>
           <a:p>
@@ -5783,13 +5989,13 @@
               </a:lnSpc>
             </a:pPr>
             <a:r>
-              <a:rPr sz="1600" b="1">
-                <a:solidFill>
-                  <a:srgbClr val="EB6834"/>
+              <a:rPr sz="1600" b="0">
+                <a:solidFill>
+                  <a:srgbClr val="1A1A1A"/>
                 </a:solidFill>
                 <a:latin typeface="Calibri"/>
               </a:rPr>
-              <a:t>Replaying source batches returns 29% of it under a random split and 54% under a blocked one, at 4.1 to 1 and 5.4 to 1.</a:t>
+              <a:t>The method is weakest exactly where the gauge network is sparsest, which is worth stating plainly.</a:t>
             </a:r>
           </a:p>
         </p:txBody>
@@ -5802,7 +6008,7 @@
         </p:nvSpPr>
         <p:spPr>
           <a:xfrm>
-            <a:off x="640080" y="5866383"/>
+            <a:off x="640080" y="5693664"/>
             <a:ext cx="10881360" cy="252095"/>
           </a:xfrm>
           <a:prstGeom prst="rect">
@@ -5828,7 +6034,7 @@
                 </a:solidFill>
                 <a:latin typeface="Calibri"/>
               </a:rPr>
-              <a:t>Replay is legitimate rather than leakage: the premise hides the target stations' hourly data and never the source's. Paired per gauge.</a:t>
+              <a:t>Blocking is 120 k-means blocks on 3-D unit vectors, packed whole into five folds, so fold sizes stay within 10 gauges of the random split's.</a:t>
             </a:r>
           </a:p>
         </p:txBody>
@@ -5841,7 +6047,7 @@
 </p:sld>
 </file>
 
-<file path=ppt/slides/slide9.xml><?xml version="1.0" encoding="utf-8"?>
+<file path=ppt/slides/slide8.xml><?xml version="1.0" encoding="utf-8"?>
 <p:sld xmlns:a="http://schemas.openxmlformats.org/drawingml/2006/main" xmlns:p="http://schemas.openxmlformats.org/presentationml/2006/main" xmlns:r="http://schemas.openxmlformats.org/officeDocument/2006/relationships">
   <p:cSld>
     <p:spTree>
@@ -5885,7 +6091,7 @@
                 </a:solidFill>
                 <a:latin typeface="Calibri"/>
               </a:rPr>
-              <a:t>Where this stands, and what is still running</a:t>
+              <a:t>The cost to the source domain, and how much of it comes back</a:t>
             </a:r>
           </a:p>
         </p:txBody>
@@ -5934,6 +6140,225 @@
           </a:p>
         </p:txBody>
       </p:sp>
+      <p:pic>
+        <p:nvPicPr>
+          <p:cNvPr id="4" name="Picture 3" descr="fig12_replay.png"/>
+          <p:cNvPicPr>
+            <a:picLocks noChangeAspect="1"/>
+          </p:cNvPicPr>
+          <p:nvPr/>
+        </p:nvPicPr>
+        <p:blipFill>
+          <a:blip r:embed="rId2"/>
+          <a:stretch>
+            <a:fillRect/>
+          </a:stretch>
+        </p:blipFill>
+        <p:spPr>
+          <a:xfrm>
+            <a:off x="2617294" y="1627632"/>
+            <a:ext cx="6957107" cy="2834640"/>
+          </a:xfrm>
+          <a:prstGeom prst="rect">
+            <a:avLst/>
+          </a:prstGeom>
+        </p:spPr>
+      </p:pic>
+      <p:sp>
+        <p:nvSpPr>
+          <p:cNvPr id="5" name="TextBox 4"/>
+          <p:cNvSpPr txBox="1"/>
+          <p:nvPr/>
+        </p:nvSpPr>
+        <p:spPr>
+          <a:xfrm>
+            <a:off x="640080" y="4663440"/>
+            <a:ext cx="10881360" cy="1148080"/>
+          </a:xfrm>
+          <a:prstGeom prst="rect">
+            <a:avLst/>
+          </a:prstGeom>
+          <a:noFill/>
+        </p:spPr>
+        <p:txBody>
+          <a:bodyPr wrap="square">
+            <a:spAutoFit/>
+          </a:bodyPr>
+          <a:lstStyle/>
+          <a:p>
+            <a:pPr algn="l">
+              <a:lnSpc>
+                <a:spcPct val="130000"/>
+              </a:lnSpc>
+            </a:pPr>
+            <a:r>
+              <a:rPr sz="1600" b="0">
+                <a:solidFill>
+                  <a:srgbClr val="1A1A1A"/>
+                </a:solidFill>
+                <a:latin typeface="Calibri"/>
+              </a:rPr>
+              <a:t>Adapting to the daily domain degrades the hourly one: the median source gauge loses 0.054 KGE, in every fold.</a:t>
+            </a:r>
+          </a:p>
+          <a:p>
+            <a:pPr algn="l">
+              <a:lnSpc>
+                <a:spcPct val="130000"/>
+              </a:lnSpc>
+            </a:pPr>
+            <a:r>
+              <a:rPr sz="1600" b="1">
+                <a:solidFill>
+                  <a:srgbClr val="EB6834"/>
+                </a:solidFill>
+                <a:latin typeface="Calibri"/>
+              </a:rPr>
+              <a:t>Replaying source batches returns 29% of it under a random split and 54% under a blocked one, at 4.1 to 1 and 5.4 to 1.</a:t>
+            </a:r>
+          </a:p>
+        </p:txBody>
+      </p:sp>
+      <p:sp>
+        <p:nvSpPr>
+          <p:cNvPr id="6" name="TextBox 5"/>
+          <p:cNvSpPr txBox="1"/>
+          <p:nvPr/>
+        </p:nvSpPr>
+        <p:spPr>
+          <a:xfrm>
+            <a:off x="640080" y="5866383"/>
+            <a:ext cx="10881360" cy="252095"/>
+          </a:xfrm>
+          <a:prstGeom prst="rect">
+            <a:avLst/>
+          </a:prstGeom>
+          <a:noFill/>
+        </p:spPr>
+        <p:txBody>
+          <a:bodyPr wrap="square">
+            <a:spAutoFit/>
+          </a:bodyPr>
+          <a:lstStyle/>
+          <a:p>
+            <a:pPr algn="l">
+              <a:lnSpc>
+                <a:spcPct val="115000"/>
+              </a:lnSpc>
+            </a:pPr>
+            <a:r>
+              <a:rPr sz="1100" b="0">
+                <a:solidFill>
+                  <a:srgbClr val="5A5A58"/>
+                </a:solidFill>
+                <a:latin typeface="Calibri"/>
+              </a:rPr>
+              <a:t>Replay is legitimate rather than leakage: the premise hides the target stations' hourly data and never the source's. Paired per gauge.</a:t>
+            </a:r>
+          </a:p>
+        </p:txBody>
+      </p:sp>
+    </p:spTree>
+  </p:cSld>
+  <p:clrMapOvr>
+    <a:masterClrMapping/>
+  </p:clrMapOvr>
+</p:sld>
+</file>
+
+<file path=ppt/slides/slide9.xml><?xml version="1.0" encoding="utf-8"?>
+<p:sld xmlns:a="http://schemas.openxmlformats.org/drawingml/2006/main" xmlns:p="http://schemas.openxmlformats.org/presentationml/2006/main" xmlns:r="http://schemas.openxmlformats.org/officeDocument/2006/relationships">
+  <p:cSld>
+    <p:spTree>
+      <p:nvGrpSpPr>
+        <p:cNvPr id="1" name=""/>
+        <p:cNvGrpSpPr/>
+        <p:nvPr/>
+      </p:nvGrpSpPr>
+      <p:grpSpPr/>
+      <p:sp>
+        <p:nvSpPr>
+          <p:cNvPr id="2" name="TextBox 1"/>
+          <p:cNvSpPr txBox="1"/>
+          <p:nvPr/>
+        </p:nvSpPr>
+        <p:spPr>
+          <a:xfrm>
+            <a:off x="640080" y="384048"/>
+            <a:ext cx="10881360" cy="640080"/>
+          </a:xfrm>
+          <a:prstGeom prst="rect">
+            <a:avLst/>
+          </a:prstGeom>
+          <a:noFill/>
+        </p:spPr>
+        <p:txBody>
+          <a:bodyPr wrap="square">
+            <a:spAutoFit/>
+          </a:bodyPr>
+          <a:lstStyle/>
+          <a:p>
+            <a:pPr algn="l">
+              <a:lnSpc>
+                <a:spcPct val="115000"/>
+              </a:lnSpc>
+            </a:pPr>
+            <a:r>
+              <a:rPr sz="2700" b="1">
+                <a:solidFill>
+                  <a:srgbClr val="1A1A1A"/>
+                </a:solidFill>
+                <a:latin typeface="Calibri"/>
+              </a:rPr>
+              <a:t>Two readings that would deflate the result, and the runs that answer them</a:t>
+            </a:r>
+          </a:p>
+        </p:txBody>
+      </p:sp>
+      <p:sp>
+        <p:nvSpPr>
+          <p:cNvPr id="3" name="Rectangle 2"/>
+          <p:cNvSpPr/>
+          <p:nvPr/>
+        </p:nvSpPr>
+        <p:spPr>
+          <a:xfrm>
+            <a:off x="640080" y="1207008"/>
+            <a:ext cx="10908792" cy="9525"/>
+          </a:xfrm>
+          <a:prstGeom prst="rect">
+            <a:avLst/>
+          </a:prstGeom>
+          <a:solidFill>
+            <a:srgbClr val="D8D6D0"/>
+          </a:solidFill>
+          <a:ln>
+            <a:noFill/>
+          </a:ln>
+          <a:effectLst/>
+        </p:spPr>
+        <p:style>
+          <a:lnRef idx="1">
+            <a:schemeClr val="accent1"/>
+          </a:lnRef>
+          <a:fillRef idx="3">
+            <a:schemeClr val="accent1"/>
+          </a:fillRef>
+          <a:effectRef idx="2">
+            <a:schemeClr val="accent1"/>
+          </a:effectRef>
+          <a:fontRef idx="minor">
+            <a:schemeClr val="lt1"/>
+          </a:fontRef>
+        </p:style>
+        <p:txBody>
+          <a:bodyPr rtlCol="0" anchor="ctr"/>
+          <a:lstStyle/>
+          <a:p>
+            <a:pPr algn="ctr"/>
+          </a:p>
+        </p:txBody>
+      </p:sp>
       <p:sp>
         <p:nvSpPr>
           <p:cNvPr id="4" name="TextBox 3"/>
@@ -5962,13 +6387,13 @@
               </a:lnSpc>
             </a:pPr>
             <a:r>
-              <a:rPr sz="1600" b="0">
+              <a:rPr sz="1500" b="0">
                 <a:solidFill>
                   <a:srgbClr val="1A1A1A"/>
                 </a:solidFill>
                 <a:latin typeface="Calibri"/>
               </a:rPr>
-              <a:t>Settled</a:t>
+              <a:t>The gain repairs amplitude and volume. A per-gauge rescaling repairs those with arithmetic, so does it?</a:t>
             </a:r>
           </a:p>
           <a:p>
@@ -5978,13 +6403,13 @@
               </a:lnSpc>
             </a:pPr>
             <a:r>
-              <a:rPr sz="1600" b="0">
-                <a:solidFill>
-                  <a:srgbClr val="1A1A1A"/>
+              <a:rPr sz="1500" b="1">
+                <a:solidFill>
+                  <a:srgbClr val="EB6834"/>
                 </a:solidFill>
                 <a:latin typeface="Calibri"/>
               </a:rPr>
-              <a:t>  Five-fold cross-validation on 8,843 gauges, six agencies</a:t>
+              <a:t>  No. Fitted on the training-period daily means and applied to the zero-shot output, a volume correction gives -0.0015 against fine-tuning's +0.0573, and fine-tuning leads on 70% of gauges.</a:t>
             </a:r>
           </a:p>
           <a:p>
@@ -5994,13 +6419,13 @@
               </a:lnSpc>
             </a:pPr>
             <a:r>
-              <a:rPr sz="1600" b="0">
+              <a:rPr sz="1500" b="0">
                 <a:solidFill>
                   <a:srgbClr val="1A1A1A"/>
                 </a:solidFill>
                 <a:latin typeface="Calibri"/>
               </a:rPr>
-              <a:t>  Spatially blocked split, 10.4 km to 94.9 km nearest trainable neighbour</a:t>
+              <a:t>  Volume is already near-right at M0. The gain is in amplitude, and the standard deviation of daily means is not that of the hourly series, so no daily-derived factor can express the correction the model performs.</a:t>
             </a:r>
           </a:p>
           <a:p>
@@ -6010,13 +6435,13 @@
               </a:lnSpc>
             </a:pPr>
             <a:r>
-              <a:rPr sz="1600" b="0">
+              <a:rPr sz="1500" b="0">
                 <a:solidFill>
                   <a:srgbClr val="1A1A1A"/>
                 </a:solidFill>
                 <a:latin typeface="Calibri"/>
               </a:rPr>
-              <a:t>  External test on 282 African basins, none seen in training</a:t>
+              <a:t/>
             </a:r>
           </a:p>
           <a:p>
@@ -6026,13 +6451,13 @@
               </a:lnSpc>
             </a:pPr>
             <a:r>
-              <a:rPr sz="1600" b="0">
+              <a:rPr sz="1500" b="0">
                 <a:solidFill>
                   <a:srgbClr val="1A1A1A"/>
                 </a:solidFill>
                 <a:latin typeface="Calibri"/>
               </a:rPr>
-              <a:t>  Single-variable ablation, all five folds:</a:t>
+              <a:t>The premise hides hourly data. So hourly supervision would be better?</a:t>
             </a:r>
           </a:p>
           <a:p>
@@ -6042,13 +6467,13 @@
               </a:lnSpc>
             </a:pPr>
             <a:r>
-              <a:rPr sz="1600" b="0">
-                <a:solidFill>
-                  <a:srgbClr val="1A1A1A"/>
+              <a:rPr sz="1500" b="1">
+                <a:solidFill>
+                  <a:srgbClr val="EB6834"/>
                 </a:solidFill>
                 <a:latin typeface="Calibri"/>
               </a:rPr>
-              <a:t>  forget gate 0 -&gt; 3: +0.0176 (sd 0.0086, 5 folds)</a:t>
+              <a:t>  No. Daily-only gains +0.0576; hourly supervision +0.0335 to +0.0327.</a:t>
             </a:r>
           </a:p>
           <a:p>
@@ -6058,13 +6483,13 @@
               </a:lnSpc>
             </a:pPr>
             <a:r>
-              <a:rPr sz="1600" b="0">
+              <a:rPr sz="1500" b="0">
                 <a:solidFill>
                   <a:srgbClr val="1A1A1A"/>
                 </a:solidFill>
                 <a:latin typeface="Calibri"/>
               </a:rPr>
-              <a:t>  hourly look-back 72 -&gt; 336: +0.0581 (sd 0.0313, 5 folds)</a:t>
+              <a:t>  All three arms were swept over the transfer learning rate, which had never been searched. Each peaks at 2e-4, and there the daily objective still leads by +0.0121.</a:t>
             </a:r>
           </a:p>
           <a:p>
@@ -6074,109 +6499,13 @@
               </a:lnSpc>
             </a:pPr>
             <a:r>
-              <a:rPr sz="1600" b="0">
+              <a:rPr sz="1500" b="0">
                 <a:solidFill>
                   <a:srgbClr val="1A1A1A"/>
                 </a:solidFill>
                 <a:latin typeface="Calibri"/>
               </a:rPr>
-              <a:t/>
-            </a:r>
-          </a:p>
-          <a:p>
-            <a:pPr algn="l">
-              <a:lnSpc>
-                <a:spcPct val="145000"/>
-              </a:lnSpc>
-            </a:pPr>
-            <a:r>
-              <a:rPr sz="1600" b="0">
-                <a:solidFill>
-                  <a:srgbClr val="1A1A1A"/>
-                </a:solidFill>
-                <a:latin typeface="Calibri"/>
-              </a:rPr>
-              <a:t>Running</a:t>
-            </a:r>
-          </a:p>
-          <a:p>
-            <a:pPr algn="l">
-              <a:lnSpc>
-                <a:spcPct val="145000"/>
-              </a:lnSpc>
-            </a:pPr>
-            <a:r>
-              <a:rPr sz="1600" b="1">
-                <a:solidFill>
-                  <a:srgbClr val="EB6834"/>
-                </a:solidFill>
-                <a:latin typeface="Calibri"/>
-              </a:rPr>
-              <a:t>  Rescaling control: is the gain more than a per-gauge stretch of the zero-shot output? This is the one that decides how large a claim the paper can make.</a:t>
-            </a:r>
-          </a:p>
-          <a:p>
-            <a:pPr algn="l">
-              <a:lnSpc>
-                <a:spcPct val="145000"/>
-              </a:lnSpc>
-            </a:pPr>
-            <a:r>
-              <a:rPr sz="1600" b="0">
-                <a:solidFill>
-                  <a:srgbClr val="1A1A1A"/>
-                </a:solidFill>
-                <a:latin typeface="Calibri"/>
-              </a:rPr>
-              <a:t>  Learning-rate sweep, 30 jobs across three arms, testing an unexpected result under a configuration tuned for each arm</a:t>
-            </a:r>
-          </a:p>
-          <a:p>
-            <a:pPr algn="l">
-              <a:lnSpc>
-                <a:spcPct val="145000"/>
-              </a:lnSpc>
-            </a:pPr>
-            <a:r>
-              <a:rPr sz="1600" b="0">
-                <a:solidFill>
-                  <a:srgbClr val="1A1A1A"/>
-                </a:solidFill>
-                <a:latin typeface="Calibri"/>
-              </a:rPr>
-              <a:t/>
-            </a:r>
-          </a:p>
-          <a:p>
-            <a:pPr algn="l">
-              <a:lnSpc>
-                <a:spcPct val="145000"/>
-              </a:lnSpc>
-            </a:pPr>
-            <a:r>
-              <a:rPr sz="1600" b="0">
-                <a:solidFill>
-                  <a:srgbClr val="1A1A1A"/>
-                </a:solidFill>
-                <a:latin typeface="Calibri"/>
-              </a:rPr>
-              <a:t>Publication</a:t>
-            </a:r>
-          </a:p>
-          <a:p>
-            <a:pPr algn="l">
-              <a:lnSpc>
-                <a:spcPct val="145000"/>
-              </a:lnSpc>
-            </a:pPr>
-            <a:r>
-              <a:rPr sz="1600" b="0">
-                <a:solidFill>
-                  <a:srgbClr val="1A1A1A"/>
-                </a:solidFill>
-                <a:latin typeface="Calibri"/>
-              </a:rPr>
-              <a:t>  Solid for HESS or WRR now. A favourable rescaling control opens a higher venue.</a:t>
+              <a:t>  The difference is entirely amplitude: daily supervision moves alpha 0.821 to 0.856, hourly supervision to 0.794.</a:t>
             </a:r>
           </a:p>
         </p:txBody>

--- a/reports/slides/PhaseI_briefing.pptx
+++ b/reports/slides/PhaseI_briefing.pptx
@@ -4608,6 +4608,22 @@
                 <a:latin typeface="Calibri"/>
               </a:rPr>
               <a:t>  Rescaling control and hourly-supervision reference arms, five folds each</a:t>
+            </a:r>
+          </a:p>
+          <a:p>
+            <a:pPr algn="l">
+              <a:lnSpc>
+                <a:spcPct val="145000"/>
+              </a:lnSpc>
+            </a:pPr>
+            <a:r>
+              <a:rPr sz="1500" b="0">
+                <a:solidFill>
+                  <a:srgbClr val="1A1A1A"/>
+                </a:solidFill>
+                <a:latin typeface="Calibri"/>
+              </a:rPr>
+              <a:t>  Every arm re-run at a second transfer learning rate: the random-split gain spans +0.0577 to +0.0630, the blocked +0.1230 to +0.1263, both far inside the blocked split's own fold spread</a:t>
             </a:r>
           </a:p>
           <a:p>

--- a/reports/slides/PhaseI_briefing.pptx
+++ b/reports/slides/PhaseI_briefing.pptx
@@ -15,6 +15,9 @@
     <p:sldId id="263" r:id="rId15"/>
     <p:sldId id="264" r:id="rId16"/>
     <p:sldId id="265" r:id="rId17"/>
+    <p:sldId id="266" r:id="rId18"/>
+    <p:sldId id="267" r:id="rId19"/>
+    <p:sldId id="268" r:id="rId20"/>
   </p:sldIdLst>
   <p:sldSz cx="12191695" cy="6858000" type="screen4x3"/>
   <p:notesSz cx="6858000" cy="9144000"/>
@@ -581,7 +584,241 @@
           <a:lstStyle/>
           <a:p>
             <a:r>
+              <a:t>Most transfer-learning papers do not report what the source domain loses. This slide is about method rigour as much as about replay.</a:t>
+            </a:r>
+          </a:p>
+          <a:p/>
+          <a:p>
+            <a:r>
+              <a:t>Note the asymmetry that matters: blocking more than doubles the damage, from 0.051 to 0.120, and replay then returns a larger share of it. So replay is not an artefact of the easy split.</a:t>
+            </a:r>
+          </a:p>
+        </p:txBody>
+      </p:sp>
+      <p:sp>
+        <p:nvSpPr>
+          <p:cNvPr id="4" name="Slide Number Placeholder 3"/>
+          <p:cNvSpPr>
+            <a:spLocks noGrp="1"/>
+          </p:cNvSpPr>
+          <p:nvPr>
+            <p:ph type="sldNum" idx="5" sz="quarter"/>
+          </p:nvPr>
+        </p:nvSpPr>
+        <p:spPr/>
+      </p:sp>
+    </p:spTree>
+  </p:cSld>
+  <p:clrMapOvr>
+    <a:masterClrMapping/>
+  </p:clrMapOvr>
+</p:notes>
+</file>
+
+<file path=ppt/notesSlides/notesSlide11.xml><?xml version="1.0" encoding="utf-8"?>
+<p:notes xmlns:a="http://schemas.openxmlformats.org/drawingml/2006/main" xmlns:p="http://schemas.openxmlformats.org/presentationml/2006/main" xmlns:r="http://schemas.openxmlformats.org/officeDocument/2006/relationships">
+  <p:cSld>
+    <p:spTree>
+      <p:nvGrpSpPr>
+        <p:cNvPr id="1" name=""/>
+        <p:cNvGrpSpPr/>
+        <p:nvPr/>
+      </p:nvGrpSpPr>
+      <p:grpSpPr>
+        <a:xfrm>
+          <a:off x="0" y="0"/>
+          <a:ext cx="0" cy="0"/>
+          <a:chOff x="0" y="0"/>
+          <a:chExt cx="0" cy="0"/>
+        </a:xfrm>
+      </p:grpSpPr>
+      <p:sp>
+        <p:nvSpPr>
+          <p:cNvPr id="2" name="Slide Image Placeholder 1"/>
+          <p:cNvSpPr>
+            <a:spLocks noGrp="1"/>
+          </p:cNvSpPr>
+          <p:nvPr>
+            <p:ph type="sldImg" idx="2"/>
+          </p:nvPr>
+        </p:nvSpPr>
+        <p:spPr/>
+      </p:sp>
+      <p:sp>
+        <p:nvSpPr>
+          <p:cNvPr id="3" name="Notes Placeholder 2"/>
+          <p:cNvSpPr>
+            <a:spLocks noGrp="1"/>
+          </p:cNvSpPr>
+          <p:nvPr>
+            <p:ph type="body" idx="3" sz="quarter"/>
+          </p:nvPr>
+        </p:nvSpPr>
+        <p:spPr/>
+        <p:txBody>
+          <a:bodyPr/>
+          <a:lstStyle/>
+          <a:p>
+            <a:r>
+              <a:t>These two slides' worth of runs are what moved the claim from 'daily data is a workable substitute' to 'daily aggregate supervision is the better transfer signal'. Both objections are the reader's natural next thought, and neither is answerable by argument.</a:t>
+            </a:r>
+          </a:p>
+          <a:p/>
+          <a:p>
+            <a:r>
+              <a:t>Remaining caveat, state it if asked: hyperparameters other than the learning rate were inherited from the daily configuration.</a:t>
+            </a:r>
+          </a:p>
+          <a:p/>
+          <a:p>
+            <a:r>
+              <a:t>The plausible mechanism for the second result is that the daily objective is a constrained one, weighting the aggregate term at 0.5 and leaving the hourly branch frozen, and the constraint regularises.</a:t>
+            </a:r>
+          </a:p>
+        </p:txBody>
+      </p:sp>
+      <p:sp>
+        <p:nvSpPr>
+          <p:cNvPr id="4" name="Slide Number Placeholder 3"/>
+          <p:cNvSpPr>
+            <a:spLocks noGrp="1"/>
+          </p:cNvSpPr>
+          <p:nvPr>
+            <p:ph type="sldNum" idx="5" sz="quarter"/>
+          </p:nvPr>
+        </p:nvSpPr>
+        <p:spPr/>
+      </p:sp>
+    </p:spTree>
+  </p:cSld>
+  <p:clrMapOvr>
+    <a:masterClrMapping/>
+  </p:clrMapOvr>
+</p:notes>
+</file>
+
+<file path=ppt/notesSlides/notesSlide12.xml><?xml version="1.0" encoding="utf-8"?>
+<p:notes xmlns:a="http://schemas.openxmlformats.org/drawingml/2006/main" xmlns:p="http://schemas.openxmlformats.org/presentationml/2006/main" xmlns:r="http://schemas.openxmlformats.org/officeDocument/2006/relationships">
+  <p:cSld>
+    <p:spTree>
+      <p:nvGrpSpPr>
+        <p:cNvPr id="1" name=""/>
+        <p:cNvGrpSpPr/>
+        <p:nvPr/>
+      </p:nvGrpSpPr>
+      <p:grpSpPr>
+        <a:xfrm>
+          <a:off x="0" y="0"/>
+          <a:ext cx="0" cy="0"/>
+          <a:chOff x="0" y="0"/>
+          <a:chExt cx="0" cy="0"/>
+        </a:xfrm>
+      </p:grpSpPr>
+      <p:sp>
+        <p:nvSpPr>
+          <p:cNvPr id="2" name="Slide Image Placeholder 1"/>
+          <p:cNvSpPr>
+            <a:spLocks noGrp="1"/>
+          </p:cNvSpPr>
+          <p:nvPr>
+            <p:ph type="sldImg" idx="2"/>
+          </p:nvPr>
+        </p:nvSpPr>
+        <p:spPr/>
+      </p:sp>
+      <p:sp>
+        <p:nvSpPr>
+          <p:cNvPr id="3" name="Notes Placeholder 2"/>
+          <p:cNvSpPr>
+            <a:spLocks noGrp="1"/>
+          </p:cNvSpPr>
+          <p:nvPr>
+            <p:ph type="body" idx="3" sz="quarter"/>
+          </p:nvPr>
+        </p:nvSpPr>
+        <p:spPr/>
+        <p:txBody>
+          <a:bodyPr/>
+          <a:lstStyle/>
+          <a:p>
+            <a:r>
               <a:t>Optional next step worth mentioning: the daily arm's own best rate is 2e-4, not the 5e-4 used throughout, which would lift the headline gain from +0.058 to +0.064. Re-running the blocked, Africa and replay arms at that rate is a few hours and would make every number consistent at the better configuration.</a:t>
+            </a:r>
+          </a:p>
+        </p:txBody>
+      </p:sp>
+      <p:sp>
+        <p:nvSpPr>
+          <p:cNvPr id="4" name="Slide Number Placeholder 3"/>
+          <p:cNvSpPr>
+            <a:spLocks noGrp="1"/>
+          </p:cNvSpPr>
+          <p:nvPr>
+            <p:ph type="sldNum" idx="5" sz="quarter"/>
+          </p:nvPr>
+        </p:nvSpPr>
+        <p:spPr/>
+      </p:sp>
+    </p:spTree>
+  </p:cSld>
+  <p:clrMapOvr>
+    <a:masterClrMapping/>
+  </p:clrMapOvr>
+</p:notes>
+</file>
+
+<file path=ppt/notesSlides/notesSlide13.xml><?xml version="1.0" encoding="utf-8"?>
+<p:notes xmlns:a="http://schemas.openxmlformats.org/drawingml/2006/main" xmlns:p="http://schemas.openxmlformats.org/presentationml/2006/main" xmlns:r="http://schemas.openxmlformats.org/officeDocument/2006/relationships">
+  <p:cSld>
+    <p:spTree>
+      <p:nvGrpSpPr>
+        <p:cNvPr id="1" name=""/>
+        <p:cNvGrpSpPr/>
+        <p:nvPr/>
+      </p:nvGrpSpPr>
+      <p:grpSpPr>
+        <a:xfrm>
+          <a:off x="0" y="0"/>
+          <a:ext cx="0" cy="0"/>
+          <a:chOff x="0" y="0"/>
+          <a:chExt cx="0" cy="0"/>
+        </a:xfrm>
+      </p:grpSpPr>
+      <p:sp>
+        <p:nvSpPr>
+          <p:cNvPr id="2" name="Slide Image Placeholder 1"/>
+          <p:cNvSpPr>
+            <a:spLocks noGrp="1"/>
+          </p:cNvSpPr>
+          <p:nvPr>
+            <p:ph type="sldImg" idx="2"/>
+          </p:nvPr>
+        </p:nvSpPr>
+        <p:spPr/>
+      </p:sp>
+      <p:sp>
+        <p:nvSpPr>
+          <p:cNvPr id="3" name="Notes Placeholder 2"/>
+          <p:cNvSpPr>
+            <a:spLocks noGrp="1"/>
+          </p:cNvSpPr>
+          <p:nvPr>
+            <p:ph type="body" idx="3" sz="quarter"/>
+          </p:nvPr>
+        </p:nvSpPr>
+        <p:spPr/>
+        <p:txBody>
+          <a:bodyPr/>
+          <a:lstStyle/>
+          <a:p>
+            <a:r>
+              <a:t>Items 1 and 2 are the ones that change what the paper can claim. Item 3 would turn an observation into a mechanism and is the most interesting of the four scientifically. Item 4 is housekeeping.</a:t>
+            </a:r>
+          </a:p>
+          <a:p/>
+          <a:p>
+            <a:r>
+              <a:t>If asked what would be needed to serve large basins properly rather than just measure the failure: distributed forcing instead of catchment means, or an explicit routing component. Both are architecture work, not a re-run.</a:t>
             </a:r>
           </a:p>
         </p:txBody>
@@ -1047,7 +1284,13 @@
           <a:lstStyle/>
           <a:p>
             <a:r>
-              <a:t>Fold-to-fold spread also rises sharply under blocking, from 0.0035 to 0.0411, a factor of 11.8, because each blocked fold holds out different continents and climates rather than a different sample of the same regions. Report the blocked numbers as the honest ones; the random split flatters both the level and the precision.</a:t>
+              <a:t>Say this before being asked. The deck's title claims hourly transfer and its most striking application cannot verify hourly skill, so a listener who notices that on their own will trust the rest less.</a:t>
+            </a:r>
+          </a:p>
+          <a:p/>
+          <a:p>
+            <a:r>
+              <a:t>The fix worth proposing for Phase II: a pseudo-Africa holdout. Take a climatically similar region that DOES have hourly observations, tropical Australia or Brazil, pretend it has none, run the full protocol, then score the hourly output against the observations that were withheld. That converts Africa's unverifiable claim into a verifiable analogue.</a:t>
             </a:r>
           </a:p>
         </p:txBody>
@@ -1117,13 +1360,13 @@
           <a:lstStyle/>
           <a:p>
             <a:r>
-              <a:t>Most transfer-learning papers do not report what the source domain loses. This slide is about method rigour as much as about replay.</a:t>
+              <a:t>This is the slide to use if asked how we know the random split is contaminated. The within-split correlation is the strongest single piece, because the training set, hyperparameters and fold count are all identical and only distance varies, so it cannot be explained by the blocked split holding out harder regions.</a:t>
             </a:r>
           </a:p>
           <a:p/>
           <a:p>
             <a:r>
-              <a:t>Note the asymmetry that matters: blocking more than doubles the damage, from 0.051 to 0.120, and replay then returns a larger share of it. So replay is not an artefact of the easy split.</a:t>
+              <a:t>A random split also flatters the PRECISION, not only the level: fold-to-fold standard deviation of M1 is 0.0035 random against 0.0411 blocked, a factor of 11.8, because each blocked fold holds out different continents rather than a different sample of the same regions. Quote the blocked numbers with their spread as the honest ones.</a:t>
             </a:r>
           </a:p>
         </p:txBody>
@@ -1193,19 +1436,7 @@
           <a:lstStyle/>
           <a:p>
             <a:r>
-              <a:t>These two slides' worth of runs are what moved the claim from 'daily data is a workable substitute' to 'daily aggregate supervision is the better transfer signal'. Both objections are the reader's natural next thought, and neither is answerable by argument.</a:t>
-            </a:r>
-          </a:p>
-          <a:p/>
-          <a:p>
-            <a:r>
-              <a:t>Remaining caveat, state it if asked: hyperparameters other than the learning rate were inherited from the daily configuration.</a:t>
-            </a:r>
-          </a:p>
-          <a:p/>
-          <a:p>
-            <a:r>
-              <a:t>The plausible mechanism for the second result is that the daily objective is a constrained one, weighting the aggregate term at 0.5 and leaving the hourly branch frozen, and the constraint regularises.</a:t>
+              <a:t>Fold-to-fold spread also rises sharply under blocking, from 0.0035 to 0.0411, a factor of 11.8, because each blocked fold holds out different continents and climates rather than a different sample of the same regions. Report the blocked numbers as the honest ones; the random split flatters both the level and the precision.</a:t>
             </a:r>
           </a:p>
         </p:txBody>
@@ -4412,7 +4643,7 @@
                 </a:solidFill>
                 <a:latin typeface="Calibri"/>
               </a:rPr>
-              <a:t>Where this stands</a:t>
+              <a:t>The cost to the source domain, and how much of it comes back</a:t>
             </a:r>
           </a:p>
         </p:txBody>
@@ -4461,16 +4692,40 @@
           </a:p>
         </p:txBody>
       </p:sp>
-      <p:sp>
-        <p:nvSpPr>
-          <p:cNvPr id="4" name="TextBox 3"/>
+      <p:pic>
+        <p:nvPicPr>
+          <p:cNvPr id="4" name="Picture 3" descr="fig12_replay.png"/>
+          <p:cNvPicPr>
+            <a:picLocks noChangeAspect="1"/>
+          </p:cNvPicPr>
+          <p:nvPr/>
+        </p:nvPicPr>
+        <p:blipFill>
+          <a:blip r:embed="rId2"/>
+          <a:stretch>
+            <a:fillRect/>
+          </a:stretch>
+        </p:blipFill>
+        <p:spPr>
+          <a:xfrm>
+            <a:off x="2617294" y="1627632"/>
+            <a:ext cx="6957107" cy="2834640"/>
+          </a:xfrm>
+          <a:prstGeom prst="rect">
+            <a:avLst/>
+          </a:prstGeom>
+        </p:spPr>
+      </p:pic>
+      <p:sp>
+        <p:nvSpPr>
+          <p:cNvPr id="5" name="TextBox 4"/>
           <p:cNvSpPr txBox="1"/>
           <p:nvPr/>
         </p:nvSpPr>
         <p:spPr>
           <a:xfrm>
-            <a:off x="640080" y="1600200"/>
-            <a:ext cx="10881360" cy="4754880"/>
+            <a:off x="640080" y="4663440"/>
+            <a:ext cx="10881360" cy="1148080"/>
           </a:xfrm>
           <a:prstGeom prst="rect">
             <a:avLst/>
@@ -4485,241 +4740,72 @@
           <a:p>
             <a:pPr algn="l">
               <a:lnSpc>
-                <a:spcPct val="145000"/>
-              </a:lnSpc>
-            </a:pPr>
-            <a:r>
-              <a:rPr sz="1500" b="0">
+                <a:spcPct val="130000"/>
+              </a:lnSpc>
+            </a:pPr>
+            <a:r>
+              <a:rPr sz="1600" b="0">
                 <a:solidFill>
                   <a:srgbClr val="1A1A1A"/>
                 </a:solidFill>
                 <a:latin typeface="Calibri"/>
               </a:rPr>
-              <a:t>Settled</a:t>
-            </a:r>
-          </a:p>
-          <a:p>
-            <a:pPr algn="l">
-              <a:lnSpc>
-                <a:spcPct val="145000"/>
-              </a:lnSpc>
-            </a:pPr>
-            <a:r>
-              <a:rPr sz="1500" b="0">
-                <a:solidFill>
-                  <a:srgbClr val="1A1A1A"/>
-                </a:solidFill>
-                <a:latin typeface="Calibri"/>
-              </a:rPr>
-              <a:t>  Five-fold cross-validation on 8,843 gauges, six agencies</a:t>
-            </a:r>
-          </a:p>
-          <a:p>
-            <a:pPr algn="l">
-              <a:lnSpc>
-                <a:spcPct val="145000"/>
-              </a:lnSpc>
-            </a:pPr>
-            <a:r>
-              <a:rPr sz="1500" b="0">
-                <a:solidFill>
-                  <a:srgbClr val="1A1A1A"/>
-                </a:solidFill>
-                <a:latin typeface="Calibri"/>
-              </a:rPr>
-              <a:t>  Spatially blocked split, 10.4 km to 94.9 km nearest trainable neighbour</a:t>
-            </a:r>
-          </a:p>
-          <a:p>
-            <a:pPr algn="l">
-              <a:lnSpc>
-                <a:spcPct val="145000"/>
-              </a:lnSpc>
-            </a:pPr>
-            <a:r>
-              <a:rPr sz="1500" b="0">
-                <a:solidFill>
-                  <a:srgbClr val="1A1A1A"/>
-                </a:solidFill>
-                <a:latin typeface="Calibri"/>
-              </a:rPr>
-              <a:t>  External test on 282 African basins, none seen in training</a:t>
-            </a:r>
-          </a:p>
-          <a:p>
-            <a:pPr algn="l">
-              <a:lnSpc>
-                <a:spcPct val="145000"/>
-              </a:lnSpc>
-            </a:pPr>
-            <a:r>
-              <a:rPr sz="1500" b="0">
-                <a:solidFill>
-                  <a:srgbClr val="1A1A1A"/>
-                </a:solidFill>
-                <a:latin typeface="Calibri"/>
-              </a:rPr>
-              <a:t>  Single-variable ablation, all five folds:</a:t>
-            </a:r>
-          </a:p>
-          <a:p>
-            <a:pPr algn="l">
-              <a:lnSpc>
-                <a:spcPct val="145000"/>
-              </a:lnSpc>
-            </a:pPr>
-            <a:r>
-              <a:rPr sz="1500" b="0">
-                <a:solidFill>
-                  <a:srgbClr val="1A1A1A"/>
-                </a:solidFill>
-                <a:latin typeface="Calibri"/>
-              </a:rPr>
-              <a:t>  forget gate 0 -&gt; 3: +0.0176 (sd 0.0086, 5 folds)</a:t>
-            </a:r>
-          </a:p>
-          <a:p>
-            <a:pPr algn="l">
-              <a:lnSpc>
-                <a:spcPct val="145000"/>
-              </a:lnSpc>
-            </a:pPr>
-            <a:r>
-              <a:rPr sz="1500" b="0">
-                <a:solidFill>
-                  <a:srgbClr val="1A1A1A"/>
-                </a:solidFill>
-                <a:latin typeface="Calibri"/>
-              </a:rPr>
-              <a:t>  hourly look-back 72 -&gt; 336: +0.0581 (sd 0.0313, 5 folds)</a:t>
-            </a:r>
-          </a:p>
-          <a:p>
-            <a:pPr algn="l">
-              <a:lnSpc>
-                <a:spcPct val="145000"/>
-              </a:lnSpc>
-            </a:pPr>
-            <a:r>
-              <a:rPr sz="1500" b="0">
-                <a:solidFill>
-                  <a:srgbClr val="1A1A1A"/>
-                </a:solidFill>
-                <a:latin typeface="Calibri"/>
-              </a:rPr>
-              <a:t>  Rescaling control and hourly-supervision reference arms, five folds each</a:t>
-            </a:r>
-          </a:p>
-          <a:p>
-            <a:pPr algn="l">
-              <a:lnSpc>
-                <a:spcPct val="145000"/>
-              </a:lnSpc>
-            </a:pPr>
-            <a:r>
-              <a:rPr sz="1500" b="0">
-                <a:solidFill>
-                  <a:srgbClr val="1A1A1A"/>
-                </a:solidFill>
-                <a:latin typeface="Calibri"/>
-              </a:rPr>
-              <a:t>  Every arm re-run at a second transfer learning rate: the random-split gain spans +0.0577 to +0.0630, the blocked +0.1230 to +0.1263, both far inside the blocked split's own fold spread</a:t>
-            </a:r>
-          </a:p>
-          <a:p>
-            <a:pPr algn="l">
-              <a:lnSpc>
-                <a:spcPct val="145000"/>
-              </a:lnSpc>
-            </a:pPr>
-            <a:r>
-              <a:rPr sz="1500" b="0">
-                <a:solidFill>
-                  <a:srgbClr val="1A1A1A"/>
-                </a:solidFill>
-                <a:latin typeface="Calibri"/>
-              </a:rPr>
-              <a:t/>
-            </a:r>
-          </a:p>
-          <a:p>
-            <a:pPr algn="l">
-              <a:lnSpc>
-                <a:spcPct val="145000"/>
-              </a:lnSpc>
-            </a:pPr>
-            <a:r>
-              <a:rPr sz="1500" b="0">
-                <a:solidFill>
-                  <a:srgbClr val="1A1A1A"/>
-                </a:solidFill>
-                <a:latin typeface="Calibri"/>
-              </a:rPr>
-              <a:t>Scope, stated rather than defended</a:t>
-            </a:r>
-          </a:p>
-          <a:p>
-            <a:pPr algn="l">
-              <a:lnSpc>
-                <a:spcPct val="145000"/>
-              </a:lnSpc>
-            </a:pPr>
-            <a:r>
-              <a:rPr sz="1500" b="0">
-                <a:solidFill>
-                  <a:srgbClr val="1A1A1A"/>
-                </a:solidFill>
-                <a:latin typeface="Calibri"/>
-              </a:rPr>
-              <a:t>  Catchments to 10,000 km2, median 363. Large basins untested, and the forcing reaches the model as catchment-mean scalars, so routing is not learnable from it.</a:t>
-            </a:r>
-          </a:p>
-          <a:p>
-            <a:pPr algn="l">
-              <a:lnSpc>
-                <a:spcPct val="145000"/>
-              </a:lnSpc>
-            </a:pPr>
-            <a:r>
-              <a:rPr sz="1500" b="0">
-                <a:solidFill>
-                  <a:srgbClr val="1A1A1A"/>
-                </a:solidFill>
-                <a:latin typeface="Calibri"/>
-              </a:rPr>
-              <a:t>  Six of seven available networks; the Czech 437 gauges sit inside the retained attribute range on every compared property.</a:t>
-            </a:r>
-          </a:p>
-          <a:p>
-            <a:pPr algn="l">
-              <a:lnSpc>
-                <a:spcPct val="145000"/>
-              </a:lnSpc>
-            </a:pPr>
-            <a:r>
-              <a:rPr sz="1500" b="0">
-                <a:solidFill>
-                  <a:srgbClr val="1A1A1A"/>
-                </a:solidFill>
-                <a:latin typeface="Calibri"/>
-              </a:rPr>
-              <a:t/>
-            </a:r>
-          </a:p>
-          <a:p>
-            <a:pPr algn="l">
-              <a:lnSpc>
-                <a:spcPct val="145000"/>
-              </a:lnSpc>
-            </a:pPr>
-            <a:r>
-              <a:rPr sz="1500" b="1">
+              <a:t>Adapting to the daily domain degrades the hourly one: the median source gauge loses 0.054 KGE, in every fold.</a:t>
+            </a:r>
+          </a:p>
+          <a:p>
+            <a:pPr algn="l">
+              <a:lnSpc>
+                <a:spcPct val="130000"/>
+              </a:lnSpc>
+            </a:pPr>
+            <a:r>
+              <a:rPr sz="1600" b="1">
                 <a:solidFill>
                   <a:srgbClr val="EB6834"/>
                 </a:solidFill>
                 <a:latin typeface="Calibri"/>
               </a:rPr>
-              <a:t>Publication: the two controls above answer the objections that would have forced a smaller claim. The result is a methodological one now, not only an application.</a:t>
+              <a:t>Replaying source batches returns 29% of it under a random split and 54% under a blocked one, at 4.1 to 1 and 5.4 to 1.</a:t>
+            </a:r>
+          </a:p>
+        </p:txBody>
+      </p:sp>
+      <p:sp>
+        <p:nvSpPr>
+          <p:cNvPr id="6" name="TextBox 5"/>
+          <p:cNvSpPr txBox="1"/>
+          <p:nvPr/>
+        </p:nvSpPr>
+        <p:spPr>
+          <a:xfrm>
+            <a:off x="640080" y="5866383"/>
+            <a:ext cx="10881360" cy="252095"/>
+          </a:xfrm>
+          <a:prstGeom prst="rect">
+            <a:avLst/>
+          </a:prstGeom>
+          <a:noFill/>
+        </p:spPr>
+        <p:txBody>
+          <a:bodyPr wrap="square">
+            <a:spAutoFit/>
+          </a:bodyPr>
+          <a:lstStyle/>
+          <a:p>
+            <a:pPr algn="l">
+              <a:lnSpc>
+                <a:spcPct val="115000"/>
+              </a:lnSpc>
+            </a:pPr>
+            <a:r>
+              <a:rPr sz="1100" b="0">
+                <a:solidFill>
+                  <a:srgbClr val="5A5A58"/>
+                </a:solidFill>
+                <a:latin typeface="Calibri"/>
+              </a:rPr>
+              <a:t>Replay is legitimate rather than leakage: the premise hides the target stations' hourly data and never the source's. Paired per gauge.</a:t>
             </a:r>
           </a:p>
         </p:txBody>
@@ -4732,7 +4818,7 @@
 </p:sld>
 </file>
 
-<file path=ppt/slides/slide2.xml><?xml version="1.0" encoding="utf-8"?>
+<file path=ppt/slides/slide11.xml><?xml version="1.0" encoding="utf-8"?>
 <p:sld xmlns:a="http://schemas.openxmlformats.org/drawingml/2006/main" xmlns:p="http://schemas.openxmlformats.org/presentationml/2006/main" xmlns:r="http://schemas.openxmlformats.org/officeDocument/2006/relationships">
   <p:cSld>
     <p:spTree>
@@ -4776,7 +4862,7 @@
                 </a:solidFill>
                 <a:latin typeface="Calibri"/>
               </a:rPr>
-              <a:t>The problem is coverage, not accuracy</a:t>
+              <a:t>Two readings that would deflate the result, and the runs that answer them</a:t>
             </a:r>
           </a:p>
         </p:txBody>
@@ -4853,13 +4939,13 @@
               </a:lnSpc>
             </a:pPr>
             <a:r>
-              <a:rPr sz="1800" b="0">
+              <a:rPr sz="1500" b="0">
                 <a:solidFill>
                   <a:srgbClr val="1A1A1A"/>
                 </a:solidFill>
                 <a:latin typeface="Calibri"/>
               </a:rPr>
-              <a:t>Flood forecasting needs hourly resolution. Hourly discharge records do not exist in most of the world.</a:t>
+              <a:t>The gain repairs amplitude and volume. A per-gauge rescaling repairs those with arithmetic, so does it?</a:t>
             </a:r>
           </a:p>
           <a:p>
@@ -4869,12 +4955,44 @@
               </a:lnSpc>
             </a:pPr>
             <a:r>
-              <a:rPr sz="1800" b="0">
+              <a:rPr sz="1500" b="1">
+                <a:solidFill>
+                  <a:srgbClr val="EB6834"/>
+                </a:solidFill>
+                <a:latin typeface="Calibri"/>
+              </a:rPr>
+              <a:t>  No. Fitted on the training-period daily means and applied to the zero-shot output, a volume correction gives -0.0015 against fine-tuning's +0.0573, and fine-tuning leads on 70% of gauges.</a:t>
+            </a:r>
+          </a:p>
+          <a:p>
+            <a:pPr algn="l">
+              <a:lnSpc>
+                <a:spcPct val="145000"/>
+              </a:lnSpc>
+            </a:pPr>
+            <a:r>
+              <a:rPr sz="1500" b="0">
                 <a:solidFill>
                   <a:srgbClr val="1A1A1A"/>
                 </a:solidFill>
                 <a:latin typeface="Calibri"/>
               </a:rPr>
+              <a:t>  Volume is already near-right at M0. The gain is in amplitude, and the standard deviation of daily means is not that of the hourly series, so no daily-derived factor can express the correction the model performs.</a:t>
+            </a:r>
+          </a:p>
+          <a:p>
+            <a:pPr algn="l">
+              <a:lnSpc>
+                <a:spcPct val="145000"/>
+              </a:lnSpc>
+            </a:pPr>
+            <a:r>
+              <a:rPr sz="1500" b="0">
+                <a:solidFill>
+                  <a:srgbClr val="1A1A1A"/>
+                </a:solidFill>
+                <a:latin typeface="Calibri"/>
+              </a:rPr>
               <a:t/>
             </a:r>
           </a:p>
@@ -4885,13 +5003,29 @@
               </a:lnSpc>
             </a:pPr>
             <a:r>
-              <a:rPr sz="1800" b="1">
+              <a:rPr sz="1500" b="0">
+                <a:solidFill>
+                  <a:srgbClr val="1A1A1A"/>
+                </a:solidFill>
+                <a:latin typeface="Calibri"/>
+              </a:rPr>
+              <a:t>The premise hides hourly data. So hourly supervision would be better?</a:t>
+            </a:r>
+          </a:p>
+          <a:p>
+            <a:pPr algn="l">
+              <a:lnSpc>
+                <a:spcPct val="145000"/>
+              </a:lnSpc>
+            </a:pPr>
+            <a:r>
+              <a:rPr sz="1500" b="1">
                 <a:solidFill>
                   <a:srgbClr val="EB6834"/>
                 </a:solidFill>
                 <a:latin typeface="Calibri"/>
               </a:rPr>
-              <a:t>CAMELSH alone contributes 5,767 US gauges. All 282 African basins tested here have zero hourly discharge.</a:t>
+              <a:t>  No. Daily-only gains +0.0576; hourly supervision +0.0327 to +0.0335.</a:t>
             </a:r>
           </a:p>
           <a:p>
@@ -4901,13 +5035,13 @@
               </a:lnSpc>
             </a:pPr>
             <a:r>
-              <a:rPr sz="1800" b="0">
+              <a:rPr sz="1500" b="0">
                 <a:solidFill>
                   <a:srgbClr val="1A1A1A"/>
                 </a:solidFill>
                 <a:latin typeface="Calibri"/>
               </a:rPr>
-              <a:t/>
+              <a:t>  All three arms were swept over the transfer learning rate, which had never been searched. Each peaks at 2e-4, and there the daily objective still leads by +0.0121.</a:t>
             </a:r>
           </a:p>
           <a:p>
@@ -4917,45 +5051,13 @@
               </a:lnSpc>
             </a:pPr>
             <a:r>
-              <a:rPr sz="1800" b="0">
+              <a:rPr sz="1500" b="0">
                 <a:solidFill>
                   <a:srgbClr val="1A1A1A"/>
                 </a:solidFill>
                 <a:latin typeface="Calibri"/>
               </a:rPr>
-              <a:t>If an hourly model needs hourly data to adapt, it can never reach the regions that need it most.</a:t>
-            </a:r>
-          </a:p>
-          <a:p>
-            <a:pPr algn="l">
-              <a:lnSpc>
-                <a:spcPct val="145000"/>
-              </a:lnSpc>
-            </a:pPr>
-            <a:r>
-              <a:rPr sz="1800" b="0">
-                <a:solidFill>
-                  <a:srgbClr val="1A1A1A"/>
-                </a:solidFill>
-                <a:latin typeface="Calibri"/>
-              </a:rPr>
-              <a:t/>
-            </a:r>
-          </a:p>
-          <a:p>
-            <a:pPr algn="l">
-              <a:lnSpc>
-                <a:spcPct val="145000"/>
-              </a:lnSpc>
-            </a:pPr>
-            <a:r>
-              <a:rPr sz="1800" b="0">
-                <a:solidFill>
-                  <a:srgbClr val="1A1A1A"/>
-                </a:solidFill>
-                <a:latin typeface="Calibri"/>
-              </a:rPr>
-              <a:t>Phase I asks whether daily observations, which most of the world does have, are enough to adapt one.</a:t>
+              <a:t>  The difference is entirely amplitude: daily supervision moves alpha 0.821 to 0.856, hourly supervision to 0.794.</a:t>
             </a:r>
           </a:p>
         </p:txBody>
@@ -4968,7 +5070,7 @@
 </p:sld>
 </file>
 
-<file path=ppt/slides/slide3.xml><?xml version="1.0" encoding="utf-8"?>
+<file path=ppt/slides/slide12.xml><?xml version="1.0" encoding="utf-8"?>
 <p:sld xmlns:a="http://schemas.openxmlformats.org/drawingml/2006/main" xmlns:p="http://schemas.openxmlformats.org/presentationml/2006/main" xmlns:r="http://schemas.openxmlformats.org/officeDocument/2006/relationships">
   <p:cSld>
     <p:spTree>
@@ -5012,7 +5114,7 @@
                 </a:solidFill>
                 <a:latin typeface="Calibri"/>
               </a:rPr>
-              <a:t>The result: the harder the test, the more daily data helps</a:t>
+              <a:t>Where this stands</a:t>
             </a:r>
           </a:p>
         </p:txBody>
@@ -5061,40 +5163,16 @@
           </a:p>
         </p:txBody>
       </p:sp>
-      <p:pic>
-        <p:nvPicPr>
-          <p:cNvPr id="4" name="Picture 3" descr="fig13_headline.png"/>
-          <p:cNvPicPr>
-            <a:picLocks noChangeAspect="1"/>
-          </p:cNvPicPr>
+      <p:sp>
+        <p:nvSpPr>
+          <p:cNvPr id="4" name="TextBox 3"/>
+          <p:cNvSpPr txBox="1"/>
           <p:nvPr/>
-        </p:nvPicPr>
-        <p:blipFill>
-          <a:blip r:embed="rId2"/>
-          <a:stretch>
-            <a:fillRect/>
-          </a:stretch>
-        </p:blipFill>
+        </p:nvSpPr>
         <p:spPr>
           <a:xfrm>
-            <a:off x="3105310" y="1627632"/>
-            <a:ext cx="5981075" cy="3200400"/>
-          </a:xfrm>
-          <a:prstGeom prst="rect">
-            <a:avLst/>
-          </a:prstGeom>
-        </p:spPr>
-      </p:pic>
-      <p:sp>
-        <p:nvSpPr>
-          <p:cNvPr id="5" name="TextBox 4"/>
-          <p:cNvSpPr txBox="1"/>
-          <p:nvPr/>
-        </p:nvSpPr>
-        <p:spPr>
-          <a:xfrm>
-            <a:off x="640080" y="5029200"/>
-            <a:ext cx="10881360" cy="1148080"/>
+            <a:off x="640080" y="1600200"/>
+            <a:ext cx="10881360" cy="4754880"/>
           </a:xfrm>
           <a:prstGeom prst="rect">
             <a:avLst/>
@@ -5109,72 +5187,241 @@
           <a:p>
             <a:pPr algn="l">
               <a:lnSpc>
-                <a:spcPct val="130000"/>
-              </a:lnSpc>
-            </a:pPr>
-            <a:r>
-              <a:rPr sz="1600" b="1">
+                <a:spcPct val="145000"/>
+              </a:lnSpc>
+            </a:pPr>
+            <a:r>
+              <a:rPr sz="1500" b="0">
+                <a:solidFill>
+                  <a:srgbClr val="1A1A1A"/>
+                </a:solidFill>
+                <a:latin typeface="Calibri"/>
+              </a:rPr>
+              <a:t>Settled</a:t>
+            </a:r>
+          </a:p>
+          <a:p>
+            <a:pPr algn="l">
+              <a:lnSpc>
+                <a:spcPct val="145000"/>
+              </a:lnSpc>
+            </a:pPr>
+            <a:r>
+              <a:rPr sz="1500" b="0">
+                <a:solidFill>
+                  <a:srgbClr val="1A1A1A"/>
+                </a:solidFill>
+                <a:latin typeface="Calibri"/>
+              </a:rPr>
+              <a:t>  Five-fold cross-validation on 8,843 gauges, six agencies</a:t>
+            </a:r>
+          </a:p>
+          <a:p>
+            <a:pPr algn="l">
+              <a:lnSpc>
+                <a:spcPct val="145000"/>
+              </a:lnSpc>
+            </a:pPr>
+            <a:r>
+              <a:rPr sz="1500" b="0">
+                <a:solidFill>
+                  <a:srgbClr val="1A1A1A"/>
+                </a:solidFill>
+                <a:latin typeface="Calibri"/>
+              </a:rPr>
+              <a:t>  Spatially blocked split, 10.4 km to 94.9 km nearest trainable neighbour</a:t>
+            </a:r>
+          </a:p>
+          <a:p>
+            <a:pPr algn="l">
+              <a:lnSpc>
+                <a:spcPct val="145000"/>
+              </a:lnSpc>
+            </a:pPr>
+            <a:r>
+              <a:rPr sz="1500" b="0">
+                <a:solidFill>
+                  <a:srgbClr val="1A1A1A"/>
+                </a:solidFill>
+                <a:latin typeface="Calibri"/>
+              </a:rPr>
+              <a:t>  External test on 282 African basins, none seen in training</a:t>
+            </a:r>
+          </a:p>
+          <a:p>
+            <a:pPr algn="l">
+              <a:lnSpc>
+                <a:spcPct val="145000"/>
+              </a:lnSpc>
+            </a:pPr>
+            <a:r>
+              <a:rPr sz="1500" b="0">
+                <a:solidFill>
+                  <a:srgbClr val="1A1A1A"/>
+                </a:solidFill>
+                <a:latin typeface="Calibri"/>
+              </a:rPr>
+              <a:t>  Single-variable ablation, all five folds:</a:t>
+            </a:r>
+          </a:p>
+          <a:p>
+            <a:pPr algn="l">
+              <a:lnSpc>
+                <a:spcPct val="145000"/>
+              </a:lnSpc>
+            </a:pPr>
+            <a:r>
+              <a:rPr sz="1500" b="0">
+                <a:solidFill>
+                  <a:srgbClr val="1A1A1A"/>
+                </a:solidFill>
+                <a:latin typeface="Calibri"/>
+              </a:rPr>
+              <a:t>  forget gate 0 -&gt; 3: +0.0176 (sd 0.0086, 5 folds)</a:t>
+            </a:r>
+          </a:p>
+          <a:p>
+            <a:pPr algn="l">
+              <a:lnSpc>
+                <a:spcPct val="145000"/>
+              </a:lnSpc>
+            </a:pPr>
+            <a:r>
+              <a:rPr sz="1500" b="0">
+                <a:solidFill>
+                  <a:srgbClr val="1A1A1A"/>
+                </a:solidFill>
+                <a:latin typeface="Calibri"/>
+              </a:rPr>
+              <a:t>  hourly look-back 72 -&gt; 336: +0.0581 (sd 0.0313, 5 folds)</a:t>
+            </a:r>
+          </a:p>
+          <a:p>
+            <a:pPr algn="l">
+              <a:lnSpc>
+                <a:spcPct val="145000"/>
+              </a:lnSpc>
+            </a:pPr>
+            <a:r>
+              <a:rPr sz="1500" b="0">
+                <a:solidFill>
+                  <a:srgbClr val="1A1A1A"/>
+                </a:solidFill>
+                <a:latin typeface="Calibri"/>
+              </a:rPr>
+              <a:t>  Rescaling control and hourly-supervision reference arms, five folds each</a:t>
+            </a:r>
+          </a:p>
+          <a:p>
+            <a:pPr algn="l">
+              <a:lnSpc>
+                <a:spcPct val="145000"/>
+              </a:lnSpc>
+            </a:pPr>
+            <a:r>
+              <a:rPr sz="1500" b="0">
+                <a:solidFill>
+                  <a:srgbClr val="1A1A1A"/>
+                </a:solidFill>
+                <a:latin typeface="Calibri"/>
+              </a:rPr>
+              <a:t>  Every arm re-run at a second transfer learning rate: the random-split gain spans +0.0577 to +0.0630, the blocked +0.1230 to +0.1263, both far inside the blocked split's own fold spread</a:t>
+            </a:r>
+          </a:p>
+          <a:p>
+            <a:pPr algn="l">
+              <a:lnSpc>
+                <a:spcPct val="145000"/>
+              </a:lnSpc>
+            </a:pPr>
+            <a:r>
+              <a:rPr sz="1500" b="0">
+                <a:solidFill>
+                  <a:srgbClr val="1A1A1A"/>
+                </a:solidFill>
+                <a:latin typeface="Calibri"/>
+              </a:rPr>
+              <a:t/>
+            </a:r>
+          </a:p>
+          <a:p>
+            <a:pPr algn="l">
+              <a:lnSpc>
+                <a:spcPct val="145000"/>
+              </a:lnSpc>
+            </a:pPr>
+            <a:r>
+              <a:rPr sz="1500" b="0">
+                <a:solidFill>
+                  <a:srgbClr val="1A1A1A"/>
+                </a:solidFill>
+                <a:latin typeface="Calibri"/>
+              </a:rPr>
+              <a:t>Scope, stated rather than defended</a:t>
+            </a:r>
+          </a:p>
+          <a:p>
+            <a:pPr algn="l">
+              <a:lnSpc>
+                <a:spcPct val="145000"/>
+              </a:lnSpc>
+            </a:pPr>
+            <a:r>
+              <a:rPr sz="1500" b="0">
+                <a:solidFill>
+                  <a:srgbClr val="1A1A1A"/>
+                </a:solidFill>
+                <a:latin typeface="Calibri"/>
+              </a:rPr>
+              <a:t>  Catchments to 10,000 km2, median 363. Large basins untested, and the forcing reaches the model as catchment-mean scalars, so routing is not learnable from it.</a:t>
+            </a:r>
+          </a:p>
+          <a:p>
+            <a:pPr algn="l">
+              <a:lnSpc>
+                <a:spcPct val="145000"/>
+              </a:lnSpc>
+            </a:pPr>
+            <a:r>
+              <a:rPr sz="1500" b="0">
+                <a:solidFill>
+                  <a:srgbClr val="1A1A1A"/>
+                </a:solidFill>
+                <a:latin typeface="Calibri"/>
+              </a:rPr>
+              <a:t>  Six of seven available networks; the Czech 437 gauges sit inside the retained attribute range on every compared property.</a:t>
+            </a:r>
+          </a:p>
+          <a:p>
+            <a:pPr algn="l">
+              <a:lnSpc>
+                <a:spcPct val="145000"/>
+              </a:lnSpc>
+            </a:pPr>
+            <a:r>
+              <a:rPr sz="1500" b="0">
+                <a:solidFill>
+                  <a:srgbClr val="1A1A1A"/>
+                </a:solidFill>
+                <a:latin typeface="Calibri"/>
+              </a:rPr>
+              <a:t/>
+            </a:r>
+          </a:p>
+          <a:p>
+            <a:pPr algn="l">
+              <a:lnSpc>
+                <a:spcPct val="145000"/>
+              </a:lnSpc>
+            </a:pPr>
+            <a:r>
+              <a:rPr sz="1500" b="1">
                 <a:solidFill>
                   <a:srgbClr val="EB6834"/>
                 </a:solidFill>
                 <a:latin typeface="Calibri"/>
               </a:rPr>
-              <a:t>The gain grows from +0.062 to +0.133 to +0.409 as the test gets harder, while the two temperate endpoints land 0.004 apart.</a:t>
-            </a:r>
-          </a:p>
-          <a:p>
-            <a:pPr algn="l">
-              <a:lnSpc>
-                <a:spcPct val="130000"/>
-              </a:lnSpc>
-            </a:pPr>
-            <a:r>
-              <a:rPr sz="1600" b="0">
-                <a:solidFill>
-                  <a:srgbClr val="1A1A1A"/>
-                </a:solidFill>
-                <a:latin typeface="Calibri"/>
-              </a:rPr>
-              <a:t>The zero-shot baseline's apparent skill was partly spatial proximity. The gain from daily data was not.</a:t>
-            </a:r>
-          </a:p>
-        </p:txBody>
-      </p:sp>
-      <p:sp>
-        <p:nvSpPr>
-          <p:cNvPr id="6" name="TextBox 5"/>
-          <p:cNvSpPr txBox="1"/>
-          <p:nvPr/>
-        </p:nvSpPr>
-        <p:spPr>
-          <a:xfrm>
-            <a:off x="640080" y="6232144"/>
-            <a:ext cx="10881360" cy="412749"/>
-          </a:xfrm>
-          <a:prstGeom prst="rect">
-            <a:avLst/>
-          </a:prstGeom>
-          <a:noFill/>
-        </p:spPr>
-        <p:txBody>
-          <a:bodyPr wrap="square">
-            <a:spAutoFit/>
-          </a:bodyPr>
-          <a:lstStyle/>
-          <a:p>
-            <a:pPr algn="l">
-              <a:lnSpc>
-                <a:spcPct val="115000"/>
-              </a:lnSpc>
-            </a:pPr>
-            <a:r>
-              <a:rPr sz="1100" b="0">
-                <a:solidFill>
-                  <a:srgbClr val="5A5A58"/>
-                </a:solidFill>
-                <a:latin typeface="Calibri"/>
-              </a:rPr>
-              <a:t>Fine-tuning uses 24-hour aggregates only. The target stations' hourly observations are hidden from the loss and from epoch selection, and used solely for scoring.</a:t>
+              <a:t>Publication: the two controls above answer the objections that would have forced a smaller claim. The result is a methodological one now, not only an application.</a:t>
             </a:r>
           </a:p>
         </p:txBody>
@@ -5187,7 +5434,7 @@
 </p:sld>
 </file>
 
-<file path=ppt/slides/slide4.xml><?xml version="1.0" encoding="utf-8"?>
+<file path=ppt/slides/slide13.xml><?xml version="1.0" encoding="utf-8"?>
 <p:sld xmlns:a="http://schemas.openxmlformats.org/drawingml/2006/main" xmlns:p="http://schemas.openxmlformats.org/presentationml/2006/main" xmlns:r="http://schemas.openxmlformats.org/officeDocument/2006/relationships">
   <p:cSld>
     <p:spTree>
@@ -5231,7 +5478,7 @@
                 </a:solidFill>
                 <a:latin typeface="Calibri"/>
               </a:rPr>
-              <a:t>The same result, seen rather than tabulated</a:t>
+              <a:t>What Phase II should do, in priority order</a:t>
             </a:r>
           </a:p>
         </p:txBody>
@@ -5280,40 +5527,16 @@
           </a:p>
         </p:txBody>
       </p:sp>
-      <p:pic>
-        <p:nvPicPr>
-          <p:cNvPr id="4" name="Picture 3" descr="fig15_slide_map.png"/>
-          <p:cNvPicPr>
-            <a:picLocks noChangeAspect="1"/>
-          </p:cNvPicPr>
+      <p:sp>
+        <p:nvSpPr>
+          <p:cNvPr id="4" name="TextBox 3"/>
+          <p:cNvSpPr txBox="1"/>
           <p:nvPr/>
-        </p:nvPicPr>
-        <p:blipFill>
-          <a:blip r:embed="rId2"/>
-          <a:stretch>
-            <a:fillRect/>
-          </a:stretch>
-        </p:blipFill>
+        </p:nvSpPr>
         <p:spPr>
           <a:xfrm>
-            <a:off x="1825426" y="1627632"/>
-            <a:ext cx="8540842" cy="2286000"/>
-          </a:xfrm>
-          <a:prstGeom prst="rect">
-            <a:avLst/>
-          </a:prstGeom>
-        </p:spPr>
-      </p:pic>
-      <p:sp>
-        <p:nvSpPr>
-          <p:cNvPr id="5" name="TextBox 4"/>
-          <p:cNvSpPr txBox="1"/>
-          <p:nvPr/>
-        </p:nvSpPr>
-        <p:spPr>
-          <a:xfrm>
-            <a:off x="640080" y="4114800"/>
-            <a:ext cx="10881360" cy="883920"/>
+            <a:off x="640080" y="1600200"/>
+            <a:ext cx="10881360" cy="4754880"/>
           </a:xfrm>
           <a:prstGeom prst="rect">
             <a:avLst/>
@@ -5328,72 +5551,177 @@
           <a:p>
             <a:pPr algn="l">
               <a:lnSpc>
-                <a:spcPct val="130000"/>
-              </a:lnSpc>
-            </a:pPr>
-            <a:r>
-              <a:rPr sz="1600" b="1">
+                <a:spcPct val="145000"/>
+              </a:lnSpc>
+            </a:pPr>
+            <a:r>
+              <a:rPr sz="1500" b="1">
                 <a:solidFill>
                   <a:srgbClr val="EB6834"/>
                 </a:solidFill>
                 <a:latin typeface="Calibri"/>
               </a:rPr>
-              <a:t>Panel (b) is greener almost everywhere, across four continents and six national networks.</a:t>
-            </a:r>
-          </a:p>
-          <a:p>
-            <a:pPr algn="l">
-              <a:lnSpc>
-                <a:spcPct val="130000"/>
-              </a:lnSpc>
-            </a:pPr>
-            <a:r>
-              <a:rPr sz="1600" b="0">
+              <a:t>1.  Make the hourly claim verifiable outside the temperate domain</a:t>
+            </a:r>
+          </a:p>
+          <a:p>
+            <a:pPr algn="l">
+              <a:lnSpc>
+                <a:spcPct val="145000"/>
+              </a:lnSpc>
+            </a:pPr>
+            <a:r>
+              <a:rPr sz="1500" b="0">
                 <a:solidFill>
                   <a:srgbClr val="1A1A1A"/>
                 </a:solidFill>
                 <a:latin typeface="Calibri"/>
               </a:rPr>
-              <a:t>A median cannot show that the result belongs to no single region. The African basins are the larger markers.</a:t>
-            </a:r>
-          </a:p>
-        </p:txBody>
-      </p:sp>
-      <p:sp>
-        <p:nvSpPr>
-          <p:cNvPr id="6" name="TextBox 5"/>
-          <p:cNvSpPr txBox="1"/>
-          <p:nvPr/>
-        </p:nvSpPr>
-        <p:spPr>
-          <a:xfrm>
-            <a:off x="640080" y="5053584"/>
-            <a:ext cx="10881360" cy="252095"/>
-          </a:xfrm>
-          <a:prstGeom prst="rect">
-            <a:avLst/>
-          </a:prstGeom>
-          <a:noFill/>
-        </p:spPr>
-        <p:txBody>
-          <a:bodyPr wrap="square">
-            <a:spAutoFit/>
-          </a:bodyPr>
-          <a:lstStyle/>
-          <a:p>
-            <a:pPr algn="l">
-              <a:lnSpc>
-                <a:spcPct val="115000"/>
-              </a:lnSpc>
-            </a:pPr>
-            <a:r>
-              <a:rPr sz="1100" b="0">
-                <a:solidFill>
-                  <a:srgbClr val="5A5A58"/>
-                </a:solidFill>
-                <a:latin typeface="Calibri"/>
-              </a:rPr>
-              <a:t>Both panels share one colour scale, so they are read against each other by construction. Coastlines and national borders at 110 m resolution.</a:t>
+              <a:t>  A pseudo-Africa holdout: take tropical Australia or Brazil, which do have hourly observations, hide them, run the full protocol, then score the hourly output against what was withheld. This is the single largest gap in the story and the cheapest to close, since no new data is needed.</a:t>
+            </a:r>
+          </a:p>
+          <a:p>
+            <a:pPr algn="l">
+              <a:lnSpc>
+                <a:spcPct val="145000"/>
+              </a:lnSpc>
+            </a:pPr>
+            <a:r>
+              <a:rPr sz="1500" b="0">
+                <a:solidFill>
+                  <a:srgbClr val="1A1A1A"/>
+                </a:solidFill>
+                <a:latin typeface="Calibri"/>
+              </a:rPr>
+              <a:t/>
+            </a:r>
+          </a:p>
+          <a:p>
+            <a:pPr algn="l">
+              <a:lnSpc>
+                <a:spcPct val="145000"/>
+              </a:lnSpc>
+            </a:pPr>
+            <a:r>
+              <a:rPr sz="1500" b="1">
+                <a:solidFill>
+                  <a:srgbClr val="EB6834"/>
+                </a:solidFill>
+                <a:latin typeface="Calibri"/>
+              </a:rPr>
+              <a:t>2.  Find where catchment size breaks the method</a:t>
+            </a:r>
+          </a:p>
+          <a:p>
+            <a:pPr algn="l">
+              <a:lnSpc>
+                <a:spcPct val="145000"/>
+              </a:lnSpc>
+            </a:pPr>
+            <a:r>
+              <a:rPr sz="1500" b="0">
+                <a:solidFill>
+                  <a:srgbClr val="1A1A1A"/>
+                </a:solidFill>
+                <a:latin typeface="Calibri"/>
+              </a:rPr>
+              <a:t>  The database holds 668 catchments above the current 10,000 km2 cap and they are already prepared upstream. Raising the cap and re-running the evaluation locates the breakpoint without changing the model. Expect degradation, since the forcing reaches the model as catchment-mean scalars, but measuring where it starts is worth more than predicting it.</a:t>
+            </a:r>
+          </a:p>
+          <a:p>
+            <a:pPr algn="l">
+              <a:lnSpc>
+                <a:spcPct val="145000"/>
+              </a:lnSpc>
+            </a:pPr>
+            <a:r>
+              <a:rPr sz="1500" b="0">
+                <a:solidFill>
+                  <a:srgbClr val="1A1A1A"/>
+                </a:solidFill>
+                <a:latin typeface="Calibri"/>
+              </a:rPr>
+              <a:t/>
+            </a:r>
+          </a:p>
+          <a:p>
+            <a:pPr algn="l">
+              <a:lnSpc>
+                <a:spcPct val="145000"/>
+              </a:lnSpc>
+            </a:pPr>
+            <a:r>
+              <a:rPr sz="1500" b="0">
+                <a:solidFill>
+                  <a:srgbClr val="1A1A1A"/>
+                </a:solidFill>
+                <a:latin typeface="Calibri"/>
+              </a:rPr>
+              <a:t>3.  Ask whether the constrained objective is the mechanism</a:t>
+            </a:r>
+          </a:p>
+          <a:p>
+            <a:pPr algn="l">
+              <a:lnSpc>
+                <a:spcPct val="145000"/>
+              </a:lnSpc>
+            </a:pPr>
+            <a:r>
+              <a:rPr sz="1500" b="0">
+                <a:solidFill>
+                  <a:srgbClr val="1A1A1A"/>
+                </a:solidFill>
+                <a:latin typeface="Calibri"/>
+              </a:rPr>
+              <a:t>  Daily supervision beating hourly supervision is the most interesting result here and its explanation is currently a hypothesis. Varying the aggregate loss weight and the frozen-module set under hourly supervision would test it directly.</a:t>
+            </a:r>
+          </a:p>
+          <a:p>
+            <a:pPr algn="l">
+              <a:lnSpc>
+                <a:spcPct val="145000"/>
+              </a:lnSpc>
+            </a:pPr>
+            <a:r>
+              <a:rPr sz="1500" b="0">
+                <a:solidFill>
+                  <a:srgbClr val="1A1A1A"/>
+                </a:solidFill>
+                <a:latin typeface="Calibri"/>
+              </a:rPr>
+              <a:t/>
+            </a:r>
+          </a:p>
+          <a:p>
+            <a:pPr algn="l">
+              <a:lnSpc>
+                <a:spcPct val="145000"/>
+              </a:lnSpc>
+            </a:pPr>
+            <a:r>
+              <a:rPr sz="1500" b="0">
+                <a:solidFill>
+                  <a:srgbClr val="1A1A1A"/>
+                </a:solidFill>
+                <a:latin typeface="Calibri"/>
+              </a:rPr>
+              <a:t>4.  Add the seventh network</a:t>
+            </a:r>
+          </a:p>
+          <a:p>
+            <a:pPr algn="l">
+              <a:lnSpc>
+                <a:spcPct val="145000"/>
+              </a:lnSpc>
+            </a:pPr>
+            <a:r>
+              <a:rPr sz="1500" b="0">
+                <a:solidFill>
+                  <a:srgbClr val="1A1A1A"/>
+                </a:solidFill>
+                <a:latin typeface="Calibri"/>
+              </a:rPr>
+              <a:t>  437 Czech gauges with complete records, absent for reasons that predate this work. Low scientific value, since they add no attribute space, but it removes a question a reviewer will ask.</a:t>
             </a:r>
           </a:p>
         </p:txBody>
@@ -5406,7 +5734,7 @@
 </p:sld>
 </file>
 
-<file path=ppt/slides/slide5.xml><?xml version="1.0" encoding="utf-8"?>
+<file path=ppt/slides/slide2.xml><?xml version="1.0" encoding="utf-8"?>
 <p:sld xmlns:a="http://schemas.openxmlformats.org/drawingml/2006/main" xmlns:p="http://schemas.openxmlformats.org/presentationml/2006/main" xmlns:r="http://schemas.openxmlformats.org/officeDocument/2006/relationships">
   <p:cSld>
     <p:spTree>
@@ -5450,7 +5778,7 @@
                 </a:solidFill>
                 <a:latin typeface="Calibri"/>
               </a:rPr>
-              <a:t>Why it works, and what it cannot do</a:t>
+              <a:t>The problem is coverage, not accuracy</a:t>
             </a:r>
           </a:p>
         </p:txBody>
@@ -5499,40 +5827,16 @@
           </a:p>
         </p:txBody>
       </p:sp>
-      <p:pic>
-        <p:nvPicPr>
-          <p:cNvPr id="4" name="Picture 3" descr="fig11_component_deficits.png"/>
-          <p:cNvPicPr>
-            <a:picLocks noChangeAspect="1"/>
-          </p:cNvPicPr>
+      <p:sp>
+        <p:nvSpPr>
+          <p:cNvPr id="4" name="TextBox 3"/>
+          <p:cNvSpPr txBox="1"/>
           <p:nvPr/>
-        </p:nvPicPr>
-        <p:blipFill>
-          <a:blip r:embed="rId2"/>
-          <a:stretch>
-            <a:fillRect/>
-          </a:stretch>
-        </p:blipFill>
+        </p:nvSpPr>
         <p:spPr>
           <a:xfrm>
-            <a:off x="1977584" y="1627632"/>
-            <a:ext cx="8236527" cy="2743200"/>
-          </a:xfrm>
-          <a:prstGeom prst="rect">
-            <a:avLst/>
-          </a:prstGeom>
-        </p:spPr>
-      </p:pic>
-      <p:sp>
-        <p:nvSpPr>
-          <p:cNvPr id="5" name="TextBox 4"/>
-          <p:cNvSpPr txBox="1"/>
-          <p:nvPr/>
-        </p:nvSpPr>
-        <p:spPr>
-          <a:xfrm>
-            <a:off x="640080" y="4572000"/>
-            <a:ext cx="10881360" cy="1148080"/>
+            <a:off x="640080" y="1600200"/>
+            <a:ext cx="10881360" cy="4754880"/>
           </a:xfrm>
           <a:prstGeom prst="rect">
             <a:avLst/>
@@ -5547,72 +5851,113 @@
           <a:p>
             <a:pPr algn="l">
               <a:lnSpc>
-                <a:spcPct val="130000"/>
-              </a:lnSpc>
-            </a:pPr>
-            <a:r>
-              <a:rPr sz="1600" b="0">
+                <a:spcPct val="145000"/>
+              </a:lnSpc>
+            </a:pPr>
+            <a:r>
+              <a:rPr sz="1800" b="0">
                 <a:solidFill>
                   <a:srgbClr val="1A1A1A"/>
                 </a:solidFill>
                 <a:latin typeface="Calibri"/>
               </a:rPr>
-              <a:t>A 24-hour total carries magnitude information and no sub-daily timing information, so it should repair amplitude and volume and leave timing alone.</a:t>
-            </a:r>
-          </a:p>
-          <a:p>
-            <a:pPr algn="l">
-              <a:lnSpc>
-                <a:spcPct val="130000"/>
-              </a:lnSpc>
-            </a:pPr>
-            <a:r>
-              <a:rPr sz="1600" b="1">
+              <a:t>Flood forecasting needs hourly resolution. Hourly discharge records do not exist in most of the world.</a:t>
+            </a:r>
+          </a:p>
+          <a:p>
+            <a:pPr algn="l">
+              <a:lnSpc>
+                <a:spcPct val="145000"/>
+              </a:lnSpc>
+            </a:pPr>
+            <a:r>
+              <a:rPr sz="1800" b="0">
+                <a:solidFill>
+                  <a:srgbClr val="1A1A1A"/>
+                </a:solidFill>
+                <a:latin typeface="Calibri"/>
+              </a:rPr>
+              <a:t/>
+            </a:r>
+          </a:p>
+          <a:p>
+            <a:pPr algn="l">
+              <a:lnSpc>
+                <a:spcPct val="145000"/>
+              </a:lnSpc>
+            </a:pPr>
+            <a:r>
+              <a:rPr sz="1800" b="1">
                 <a:solidFill>
                   <a:srgbClr val="EB6834"/>
                 </a:solidFill>
                 <a:latin typeface="Calibri"/>
               </a:rPr>
-              <a:t>It does. Temperate: 25% of the magnitude deficit against 7% of the timing deficit. Africa: 72% against 32%.</a:t>
-            </a:r>
-          </a:p>
-        </p:txBody>
-      </p:sp>
-      <p:sp>
-        <p:nvSpPr>
-          <p:cNvPr id="6" name="TextBox 5"/>
-          <p:cNvSpPr txBox="1"/>
-          <p:nvPr/>
-        </p:nvSpPr>
-        <p:spPr>
-          <a:xfrm>
-            <a:off x="640080" y="5774944"/>
-            <a:ext cx="10881360" cy="252095"/>
-          </a:xfrm>
-          <a:prstGeom prst="rect">
-            <a:avLst/>
-          </a:prstGeom>
-          <a:noFill/>
-        </p:spPr>
-        <p:txBody>
-          <a:bodyPr wrap="square">
-            <a:spAutoFit/>
-          </a:bodyPr>
-          <a:lstStyle/>
-          <a:p>
-            <a:pPr algn="l">
-              <a:lnSpc>
-                <a:spcPct val="115000"/>
-              </a:lnSpc>
-            </a:pPr>
-            <a:r>
-              <a:rPr sz="1100" b="0">
-                <a:solidFill>
-                  <a:srgbClr val="5A5A58"/>
-                </a:solidFill>
-                <a:latin typeface="Calibri"/>
-              </a:rPr>
-              <a:t>Deficit is 1 - r for the correlation and |log2 x| for the two ratios, so only the fraction removed is comparable across components.</a:t>
+              <a:t>CAMELSH alone contributes 5,767 US gauges. All 282 African basins tested here have zero hourly discharge.</a:t>
+            </a:r>
+          </a:p>
+          <a:p>
+            <a:pPr algn="l">
+              <a:lnSpc>
+                <a:spcPct val="145000"/>
+              </a:lnSpc>
+            </a:pPr>
+            <a:r>
+              <a:rPr sz="1800" b="0">
+                <a:solidFill>
+                  <a:srgbClr val="1A1A1A"/>
+                </a:solidFill>
+                <a:latin typeface="Calibri"/>
+              </a:rPr>
+              <a:t/>
+            </a:r>
+          </a:p>
+          <a:p>
+            <a:pPr algn="l">
+              <a:lnSpc>
+                <a:spcPct val="145000"/>
+              </a:lnSpc>
+            </a:pPr>
+            <a:r>
+              <a:rPr sz="1800" b="0">
+                <a:solidFill>
+                  <a:srgbClr val="1A1A1A"/>
+                </a:solidFill>
+                <a:latin typeface="Calibri"/>
+              </a:rPr>
+              <a:t>If an hourly model needs hourly data to adapt, it can never reach the regions that need it most.</a:t>
+            </a:r>
+          </a:p>
+          <a:p>
+            <a:pPr algn="l">
+              <a:lnSpc>
+                <a:spcPct val="145000"/>
+              </a:lnSpc>
+            </a:pPr>
+            <a:r>
+              <a:rPr sz="1800" b="0">
+                <a:solidFill>
+                  <a:srgbClr val="1A1A1A"/>
+                </a:solidFill>
+                <a:latin typeface="Calibri"/>
+              </a:rPr>
+              <a:t/>
+            </a:r>
+          </a:p>
+          <a:p>
+            <a:pPr algn="l">
+              <a:lnSpc>
+                <a:spcPct val="145000"/>
+              </a:lnSpc>
+            </a:pPr>
+            <a:r>
+              <a:rPr sz="1800" b="0">
+                <a:solidFill>
+                  <a:srgbClr val="1A1A1A"/>
+                </a:solidFill>
+                <a:latin typeface="Calibri"/>
+              </a:rPr>
+              <a:t>Phase I asks whether daily observations, which most of the world does have, are enough to adapt one.</a:t>
             </a:r>
           </a:p>
         </p:txBody>
@@ -5625,7 +5970,7 @@
 </p:sld>
 </file>
 
-<file path=ppt/slides/slide6.xml><?xml version="1.0" encoding="utf-8"?>
+<file path=ppt/slides/slide3.xml><?xml version="1.0" encoding="utf-8"?>
 <p:sld xmlns:a="http://schemas.openxmlformats.org/drawingml/2006/main" xmlns:p="http://schemas.openxmlformats.org/presentationml/2006/main" xmlns:r="http://schemas.openxmlformats.org/officeDocument/2006/relationships">
   <p:cSld>
     <p:spTree>
@@ -5669,7 +6014,7 @@
                 </a:solidFill>
                 <a:latin typeface="Calibri"/>
               </a:rPr>
-              <a:t>What the repair looks like in a single catchment</a:t>
+              <a:t>The result: the harder the test, the more daily data helps</a:t>
             </a:r>
           </a:p>
         </p:txBody>
@@ -5720,7 +6065,7 @@
       </p:sp>
       <p:pic>
         <p:nvPicPr>
-          <p:cNvPr id="4" name="Picture 3" descr="fig14_slide_hydrograph.png"/>
+          <p:cNvPr id="4" name="Picture 3" descr="fig13_headline.png"/>
           <p:cNvPicPr>
             <a:picLocks noChangeAspect="1"/>
           </p:cNvPicPr>
@@ -5734,8 +6079,8 @@
         </p:blipFill>
         <p:spPr>
           <a:xfrm>
-            <a:off x="3147651" y="1627632"/>
-            <a:ext cx="5896393" cy="2651760"/>
+            <a:off x="3105310" y="1627632"/>
+            <a:ext cx="5981075" cy="3200400"/>
           </a:xfrm>
           <a:prstGeom prst="rect">
             <a:avLst/>
@@ -5750,8 +6095,8 @@
         </p:nvSpPr>
         <p:spPr>
           <a:xfrm>
-            <a:off x="640080" y="4480559"/>
-            <a:ext cx="10881360" cy="883920"/>
+            <a:off x="640080" y="5029200"/>
+            <a:ext cx="10881360" cy="1148080"/>
           </a:xfrm>
           <a:prstGeom prst="rect">
             <a:avLst/>
@@ -5776,7 +6121,7 @@
                 </a:solidFill>
                 <a:latin typeface="Calibri"/>
               </a:rPr>
-              <a:t>The zero-shot model in blue already has the shape and sits far below the peaks. Fine-tuning on daily totals lifts it toward the observation and leaves the shape alone.</a:t>
+              <a:t>The gain grows from +0.062 to +0.133 to +0.409 as the test gets harder, while the two temperate endpoints land 0.0069 apart.</a:t>
             </a:r>
           </a:p>
           <a:p>
@@ -5792,7 +6137,7 @@
                 </a:solidFill>
                 <a:latin typeface="Calibri"/>
               </a:rPr>
-              <a:t>This is the previous slide's mechanism in a form that needs no metric.</a:t>
+              <a:t>The zero-shot baseline's apparent skill was partly spatial proximity. The gain from daily data was not.</a:t>
             </a:r>
           </a:p>
         </p:txBody>
@@ -5805,8 +6150,8 @@
         </p:nvSpPr>
         <p:spPr>
           <a:xfrm>
-            <a:off x="640080" y="5419343"/>
-            <a:ext cx="10881360" cy="252095"/>
+            <a:off x="640080" y="6232144"/>
+            <a:ext cx="10881360" cy="412749"/>
           </a:xfrm>
           <a:prstGeom prst="rect">
             <a:avLst/>
@@ -5831,7 +6176,7 @@
                 </a:solidFill>
                 <a:latin typeface="Calibri"/>
               </a:rPr>
-              <a:t>The median and upper-quartile African catchments by fine-tuned KGE, chosen by rank rather than by eye. Neither appears anywhere in pretraining.</a:t>
+              <a:t>Fine-tuning uses 24-hour aggregates only. The target stations' hourly observations are hidden from the loss and from epoch selection, and used solely for scoring.</a:t>
             </a:r>
           </a:p>
         </p:txBody>
@@ -5844,7 +6189,7 @@
 </p:sld>
 </file>
 
-<file path=ppt/slides/slide7.xml><?xml version="1.0" encoding="utf-8"?>
+<file path=ppt/slides/slide4.xml><?xml version="1.0" encoding="utf-8"?>
 <p:sld xmlns:a="http://schemas.openxmlformats.org/drawingml/2006/main" xmlns:p="http://schemas.openxmlformats.org/presentationml/2006/main" xmlns:r="http://schemas.openxmlformats.org/officeDocument/2006/relationships">
   <p:cSld>
     <p:spTree>
@@ -5888,7 +6233,7 @@
                 </a:solidFill>
                 <a:latin typeface="Calibri"/>
               </a:rPr>
-              <a:t>The blocked split, agency by agency</a:t>
+              <a:t>The same result, seen rather than tabulated</a:t>
             </a:r>
           </a:p>
         </p:txBody>
@@ -5939,7 +6284,7 @@
       </p:sp>
       <p:pic>
         <p:nvPicPr>
-          <p:cNvPr id="4" name="Picture 3" descr="fig04_agency_recovery.png"/>
+          <p:cNvPr id="4" name="Picture 3" descr="fig15_slide_map.png"/>
           <p:cNvPicPr>
             <a:picLocks noChangeAspect="1"/>
           </p:cNvPicPr>
@@ -5953,8 +6298,8 @@
         </p:blipFill>
         <p:spPr>
           <a:xfrm>
-            <a:off x="2527667" y="1627632"/>
-            <a:ext cx="7136360" cy="2926080"/>
+            <a:off x="1825426" y="1627632"/>
+            <a:ext cx="8540842" cy="2286000"/>
           </a:xfrm>
           <a:prstGeom prst="rect">
             <a:avLst/>
@@ -5969,7 +6314,7 @@
         </p:nvSpPr>
         <p:spPr>
           <a:xfrm>
-            <a:off x="640080" y="4754880"/>
+            <a:off x="640080" y="4114800"/>
             <a:ext cx="10881360" cy="883920"/>
           </a:xfrm>
           <a:prstGeom prst="rect">
@@ -5995,7 +6340,7 @@
                 </a:solidFill>
                 <a:latin typeface="Calibri"/>
               </a:rPr>
-              <a:t>Five of six networks recover 85 to 102 percent of what spatial blocking costs. Iceland, with 73 gauges, recovers 38 percent.</a:t>
+              <a:t>Panel (b) is greener almost everywhere, across four continents and six national networks.</a:t>
             </a:r>
           </a:p>
           <a:p>
@@ -6011,7 +6356,7 @@
                 </a:solidFill>
                 <a:latin typeface="Calibri"/>
               </a:rPr>
-              <a:t>The method is weakest exactly where the gauge network is sparsest, which is worth stating plainly.</a:t>
+              <a:t>A median cannot show that the result belongs to no single region. The African basins are the larger markers.</a:t>
             </a:r>
           </a:p>
         </p:txBody>
@@ -6024,7 +6369,7 @@
         </p:nvSpPr>
         <p:spPr>
           <a:xfrm>
-            <a:off x="640080" y="5693664"/>
+            <a:off x="640080" y="5053584"/>
             <a:ext cx="10881360" cy="252095"/>
           </a:xfrm>
           <a:prstGeom prst="rect">
@@ -6050,7 +6395,7 @@
                 </a:solidFill>
                 <a:latin typeface="Calibri"/>
               </a:rPr>
-              <a:t>Blocking is 120 k-means blocks on 3-D unit vectors, packed whole into five folds, so fold sizes stay within 10 gauges of the random split's.</a:t>
+              <a:t>Both panels share one colour scale, so they are read against each other by construction. Coastlines and national borders at 110 m resolution.</a:t>
             </a:r>
           </a:p>
         </p:txBody>
@@ -6063,7 +6408,7 @@
 </p:sld>
 </file>
 
-<file path=ppt/slides/slide8.xml><?xml version="1.0" encoding="utf-8"?>
+<file path=ppt/slides/slide5.xml><?xml version="1.0" encoding="utf-8"?>
 <p:sld xmlns:a="http://schemas.openxmlformats.org/drawingml/2006/main" xmlns:p="http://schemas.openxmlformats.org/presentationml/2006/main" xmlns:r="http://schemas.openxmlformats.org/officeDocument/2006/relationships">
   <p:cSld>
     <p:spTree>
@@ -6107,7 +6452,7 @@
                 </a:solidFill>
                 <a:latin typeface="Calibri"/>
               </a:rPr>
-              <a:t>The cost to the source domain, and how much of it comes back</a:t>
+              <a:t>Why it works, and what it cannot do</a:t>
             </a:r>
           </a:p>
         </p:txBody>
@@ -6158,7 +6503,7 @@
       </p:sp>
       <p:pic>
         <p:nvPicPr>
-          <p:cNvPr id="4" name="Picture 3" descr="fig12_replay.png"/>
+          <p:cNvPr id="4" name="Picture 3" descr="fig11_component_deficits.png"/>
           <p:cNvPicPr>
             <a:picLocks noChangeAspect="1"/>
           </p:cNvPicPr>
@@ -6172,8 +6517,8 @@
         </p:blipFill>
         <p:spPr>
           <a:xfrm>
-            <a:off x="2617294" y="1627632"/>
-            <a:ext cx="6957107" cy="2834640"/>
+            <a:off x="1977584" y="1627632"/>
+            <a:ext cx="8236527" cy="2743200"/>
           </a:xfrm>
           <a:prstGeom prst="rect">
             <a:avLst/>
@@ -6188,7 +6533,7 @@
         </p:nvSpPr>
         <p:spPr>
           <a:xfrm>
-            <a:off x="640080" y="4663440"/>
+            <a:off x="640080" y="4572000"/>
             <a:ext cx="10881360" cy="1148080"/>
           </a:xfrm>
           <a:prstGeom prst="rect">
@@ -6214,7 +6559,7 @@
                 </a:solidFill>
                 <a:latin typeface="Calibri"/>
               </a:rPr>
-              <a:t>Adapting to the daily domain degrades the hourly one: the median source gauge loses 0.054 KGE, in every fold.</a:t>
+              <a:t>A 24-hour total carries magnitude information and no sub-daily timing information, so it should repair amplitude and volume and leave timing alone.</a:t>
             </a:r>
           </a:p>
           <a:p>
@@ -6230,7 +6575,7 @@
                 </a:solidFill>
                 <a:latin typeface="Calibri"/>
               </a:rPr>
-              <a:t>Replaying source batches returns 29% of it under a random split and 54% under a blocked one, at 4.1 to 1 and 5.4 to 1.</a:t>
+              <a:t>It does. Temperate: 25% of the magnitude deficit against 7% of the timing deficit. Africa: 72% against 32%.</a:t>
             </a:r>
           </a:p>
         </p:txBody>
@@ -6243,7 +6588,7 @@
         </p:nvSpPr>
         <p:spPr>
           <a:xfrm>
-            <a:off x="640080" y="5866383"/>
+            <a:off x="640080" y="5774944"/>
             <a:ext cx="10881360" cy="252095"/>
           </a:xfrm>
           <a:prstGeom prst="rect">
@@ -6269,7 +6614,7 @@
                 </a:solidFill>
                 <a:latin typeface="Calibri"/>
               </a:rPr>
-              <a:t>Replay is legitimate rather than leakage: the premise hides the target stations' hourly data and never the source's. Paired per gauge.</a:t>
+              <a:t>Deficit is 1 - r for the correlation and |log2 x| for the two ratios, so only the fraction removed is comparable across components.</a:t>
             </a:r>
           </a:p>
         </p:txBody>
@@ -6282,7 +6627,7 @@
 </p:sld>
 </file>
 
-<file path=ppt/slides/slide9.xml><?xml version="1.0" encoding="utf-8"?>
+<file path=ppt/slides/slide6.xml><?xml version="1.0" encoding="utf-8"?>
 <p:sld xmlns:a="http://schemas.openxmlformats.org/drawingml/2006/main" xmlns:p="http://schemas.openxmlformats.org/presentationml/2006/main" xmlns:r="http://schemas.openxmlformats.org/officeDocument/2006/relationships">
   <p:cSld>
     <p:spTree>
@@ -6326,7 +6671,7 @@
                 </a:solidFill>
                 <a:latin typeface="Calibri"/>
               </a:rPr>
-              <a:t>Two readings that would deflate the result, and the runs that answer them</a:t>
+              <a:t>What the repair looks like in a single catchment</a:t>
             </a:r>
           </a:p>
         </p:txBody>
@@ -6375,6 +6720,225 @@
           </a:p>
         </p:txBody>
       </p:sp>
+      <p:pic>
+        <p:nvPicPr>
+          <p:cNvPr id="4" name="Picture 3" descr="fig14_slide_hydrograph.png"/>
+          <p:cNvPicPr>
+            <a:picLocks noChangeAspect="1"/>
+          </p:cNvPicPr>
+          <p:nvPr/>
+        </p:nvPicPr>
+        <p:blipFill>
+          <a:blip r:embed="rId2"/>
+          <a:stretch>
+            <a:fillRect/>
+          </a:stretch>
+        </p:blipFill>
+        <p:spPr>
+          <a:xfrm>
+            <a:off x="3147651" y="1627632"/>
+            <a:ext cx="5896393" cy="2651760"/>
+          </a:xfrm>
+          <a:prstGeom prst="rect">
+            <a:avLst/>
+          </a:prstGeom>
+        </p:spPr>
+      </p:pic>
+      <p:sp>
+        <p:nvSpPr>
+          <p:cNvPr id="5" name="TextBox 4"/>
+          <p:cNvSpPr txBox="1"/>
+          <p:nvPr/>
+        </p:nvSpPr>
+        <p:spPr>
+          <a:xfrm>
+            <a:off x="640080" y="4480559"/>
+            <a:ext cx="10881360" cy="883920"/>
+          </a:xfrm>
+          <a:prstGeom prst="rect">
+            <a:avLst/>
+          </a:prstGeom>
+          <a:noFill/>
+        </p:spPr>
+        <p:txBody>
+          <a:bodyPr wrap="square">
+            <a:spAutoFit/>
+          </a:bodyPr>
+          <a:lstStyle/>
+          <a:p>
+            <a:pPr algn="l">
+              <a:lnSpc>
+                <a:spcPct val="130000"/>
+              </a:lnSpc>
+            </a:pPr>
+            <a:r>
+              <a:rPr sz="1600" b="1">
+                <a:solidFill>
+                  <a:srgbClr val="EB6834"/>
+                </a:solidFill>
+                <a:latin typeface="Calibri"/>
+              </a:rPr>
+              <a:t>The zero-shot model in blue already has the shape and sits far below the peaks. Fine-tuning on daily totals lifts it toward the observation and leaves the shape alone.</a:t>
+            </a:r>
+          </a:p>
+          <a:p>
+            <a:pPr algn="l">
+              <a:lnSpc>
+                <a:spcPct val="130000"/>
+              </a:lnSpc>
+            </a:pPr>
+            <a:r>
+              <a:rPr sz="1600" b="0">
+                <a:solidFill>
+                  <a:srgbClr val="1A1A1A"/>
+                </a:solidFill>
+                <a:latin typeface="Calibri"/>
+              </a:rPr>
+              <a:t>This is the previous slide's mechanism in a form that needs no metric.</a:t>
+            </a:r>
+          </a:p>
+        </p:txBody>
+      </p:sp>
+      <p:sp>
+        <p:nvSpPr>
+          <p:cNvPr id="6" name="TextBox 5"/>
+          <p:cNvSpPr txBox="1"/>
+          <p:nvPr/>
+        </p:nvSpPr>
+        <p:spPr>
+          <a:xfrm>
+            <a:off x="640080" y="5419343"/>
+            <a:ext cx="10881360" cy="252095"/>
+          </a:xfrm>
+          <a:prstGeom prst="rect">
+            <a:avLst/>
+          </a:prstGeom>
+          <a:noFill/>
+        </p:spPr>
+        <p:txBody>
+          <a:bodyPr wrap="square">
+            <a:spAutoFit/>
+          </a:bodyPr>
+          <a:lstStyle/>
+          <a:p>
+            <a:pPr algn="l">
+              <a:lnSpc>
+                <a:spcPct val="115000"/>
+              </a:lnSpc>
+            </a:pPr>
+            <a:r>
+              <a:rPr sz="1100" b="0">
+                <a:solidFill>
+                  <a:srgbClr val="5A5A58"/>
+                </a:solidFill>
+                <a:latin typeface="Calibri"/>
+              </a:rPr>
+              <a:t>The median and upper-quartile African catchments by fine-tuned KGE, chosen by rank rather than by eye. Neither appears anywhere in pretraining.</a:t>
+            </a:r>
+          </a:p>
+        </p:txBody>
+      </p:sp>
+    </p:spTree>
+  </p:cSld>
+  <p:clrMapOvr>
+    <a:masterClrMapping/>
+  </p:clrMapOvr>
+</p:sld>
+</file>
+
+<file path=ppt/slides/slide7.xml><?xml version="1.0" encoding="utf-8"?>
+<p:sld xmlns:a="http://schemas.openxmlformats.org/drawingml/2006/main" xmlns:p="http://schemas.openxmlformats.org/presentationml/2006/main" xmlns:r="http://schemas.openxmlformats.org/officeDocument/2006/relationships">
+  <p:cSld>
+    <p:spTree>
+      <p:nvGrpSpPr>
+        <p:cNvPr id="1" name=""/>
+        <p:cNvGrpSpPr/>
+        <p:nvPr/>
+      </p:nvGrpSpPr>
+      <p:grpSpPr/>
+      <p:sp>
+        <p:nvSpPr>
+          <p:cNvPr id="2" name="TextBox 1"/>
+          <p:cNvSpPr txBox="1"/>
+          <p:nvPr/>
+        </p:nvSpPr>
+        <p:spPr>
+          <a:xfrm>
+            <a:off x="640080" y="384048"/>
+            <a:ext cx="10881360" cy="640080"/>
+          </a:xfrm>
+          <a:prstGeom prst="rect">
+            <a:avLst/>
+          </a:prstGeom>
+          <a:noFill/>
+        </p:spPr>
+        <p:txBody>
+          <a:bodyPr wrap="square">
+            <a:spAutoFit/>
+          </a:bodyPr>
+          <a:lstStyle/>
+          <a:p>
+            <a:pPr algn="l">
+              <a:lnSpc>
+                <a:spcPct val="115000"/>
+              </a:lnSpc>
+            </a:pPr>
+            <a:r>
+              <a:rPr sz="2700" b="1">
+                <a:solidFill>
+                  <a:srgbClr val="1A1A1A"/>
+                </a:solidFill>
+                <a:latin typeface="Calibri"/>
+              </a:rPr>
+              <a:t>The one claim Africa cannot support</a:t>
+            </a:r>
+          </a:p>
+        </p:txBody>
+      </p:sp>
+      <p:sp>
+        <p:nvSpPr>
+          <p:cNvPr id="3" name="Rectangle 2"/>
+          <p:cNvSpPr/>
+          <p:nvPr/>
+        </p:nvSpPr>
+        <p:spPr>
+          <a:xfrm>
+            <a:off x="640080" y="1207008"/>
+            <a:ext cx="10908792" cy="9525"/>
+          </a:xfrm>
+          <a:prstGeom prst="rect">
+            <a:avLst/>
+          </a:prstGeom>
+          <a:solidFill>
+            <a:srgbClr val="D8D6D0"/>
+          </a:solidFill>
+          <a:ln>
+            <a:noFill/>
+          </a:ln>
+          <a:effectLst/>
+        </p:spPr>
+        <p:style>
+          <a:lnRef idx="1">
+            <a:schemeClr val="accent1"/>
+          </a:lnRef>
+          <a:fillRef idx="3">
+            <a:schemeClr val="accent1"/>
+          </a:fillRef>
+          <a:effectRef idx="2">
+            <a:schemeClr val="accent1"/>
+          </a:effectRef>
+          <a:fontRef idx="minor">
+            <a:schemeClr val="lt1"/>
+          </a:fontRef>
+        </p:style>
+        <p:txBody>
+          <a:bodyPr rtlCol="0" anchor="ctr"/>
+          <a:lstStyle/>
+          <a:p>
+            <a:pPr algn="ctr"/>
+          </a:p>
+        </p:txBody>
+      </p:sp>
       <p:sp>
         <p:nvSpPr>
           <p:cNvPr id="4" name="TextBox 3"/>
@@ -6409,7 +6973,7 @@
                 </a:solidFill>
                 <a:latin typeface="Calibri"/>
               </a:rPr>
-              <a:t>The gain repairs amplitude and volume. A per-gauge rescaling repairs those with arithmetic, so does it?</a:t>
+              <a:t>The premise is that Africa has no hourly discharge. That is why the region needs this method, and it is also why the hourly output there cannot be scored. No observation exists to score it against, in any of the 294 basins.</a:t>
             </a:r>
           </a:p>
           <a:p>
@@ -6419,13 +6983,29 @@
               </a:lnSpc>
             </a:pPr>
             <a:r>
+              <a:rPr sz="1500" b="0">
+                <a:solidFill>
+                  <a:srgbClr val="1A1A1A"/>
+                </a:solidFill>
+                <a:latin typeface="Calibri"/>
+              </a:rPr>
+              <a:t/>
+            </a:r>
+          </a:p>
+          <a:p>
+            <a:pPr algn="l">
+              <a:lnSpc>
+                <a:spcPct val="145000"/>
+              </a:lnSpc>
+            </a:pPr>
+            <a:r>
               <a:rPr sz="1500" b="1">
                 <a:solidFill>
                   <a:srgbClr val="EB6834"/>
                 </a:solidFill>
                 <a:latin typeface="Calibri"/>
               </a:rPr>
-              <a:t>  No. Fitted on the training-period daily means and applied to the zero-shot output, a volume correction gives -0.0015 against fine-tuning's +0.0573, and fine-tuning leads on 70% of gauges.</a:t>
+              <a:t>What can be said is what the hourly output looks like, not how accurate it is.</a:t>
             </a:r>
           </a:p>
           <a:p>
@@ -6441,7 +7021,7 @@
                 </a:solidFill>
                 <a:latin typeface="Calibri"/>
               </a:rPr>
-              <a:t>  Volume is already near-right at M0. The gain is in amplitude, and the standard deviation of daily means is not that of the hourly series, so no daily-derived factor can express the correction the model performs.</a:t>
+              <a:t>  Within-day variability falls after fine-tuning, from a coefficient of variation of 0.1246 to 0.1053 over 284 basins (paired, p = 2e-04), and it rises in 40% of them.</a:t>
             </a:r>
           </a:p>
           <a:p>
@@ -6457,6 +7037,38 @@
                 </a:solidFill>
                 <a:latin typeface="Calibri"/>
               </a:rPr>
+              <a:t>  The model damps the rainfall diurnal cycle heavily: forcing peaks at 5.36 times its own mean over the average day, the model at 1.17, a factor of 4.6.</a:t>
+            </a:r>
+          </a:p>
+          <a:p>
+            <a:pPr algn="l">
+              <a:lnSpc>
+                <a:spcPct val="145000"/>
+              </a:lnSpc>
+            </a:pPr>
+            <a:r>
+              <a:rPr sz="1500" b="0">
+                <a:solidFill>
+                  <a:srgbClr val="1A1A1A"/>
+                </a:solidFill>
+                <a:latin typeface="Calibri"/>
+              </a:rPr>
+              <a:t>  Where hourly observations DO exist, in the temperate domain, the average day is measured to be nearly flat too, so a flat response is not evidence of a flattened model.</a:t>
+            </a:r>
+          </a:p>
+          <a:p>
+            <a:pPr algn="l">
+              <a:lnSpc>
+                <a:spcPct val="145000"/>
+              </a:lnSpc>
+            </a:pPr>
+            <a:r>
+              <a:rPr sz="1500" b="0">
+                <a:solidFill>
+                  <a:srgbClr val="1A1A1A"/>
+                </a:solidFill>
+                <a:latin typeface="Calibri"/>
+              </a:rPr>
               <a:t/>
             </a:r>
           </a:p>
@@ -6473,9 +7085,133 @@
                 </a:solidFill>
                 <a:latin typeface="Calibri"/>
               </a:rPr>
-              <a:t>The premise hides hourly data. So hourly supervision would be better?</a:t>
-            </a:r>
-          </a:p>
+              <a:t>The claim that the method improves HOURLY skill rests entirely on the temperate experiment, where hourly truth exists. Africa shows the method reaches a region that has no hourly data, at daily resolution. Those are two different claims and the paper keeps them apart.</a:t>
+            </a:r>
+          </a:p>
+        </p:txBody>
+      </p:sp>
+    </p:spTree>
+  </p:cSld>
+  <p:clrMapOvr>
+    <a:masterClrMapping/>
+  </p:clrMapOvr>
+</p:sld>
+</file>
+
+<file path=ppt/slides/slide8.xml><?xml version="1.0" encoding="utf-8"?>
+<p:sld xmlns:a="http://schemas.openxmlformats.org/drawingml/2006/main" xmlns:p="http://schemas.openxmlformats.org/presentationml/2006/main" xmlns:r="http://schemas.openxmlformats.org/officeDocument/2006/relationships">
+  <p:cSld>
+    <p:spTree>
+      <p:nvGrpSpPr>
+        <p:cNvPr id="1" name=""/>
+        <p:cNvGrpSpPr/>
+        <p:nvPr/>
+      </p:nvGrpSpPr>
+      <p:grpSpPr/>
+      <p:sp>
+        <p:nvSpPr>
+          <p:cNvPr id="2" name="TextBox 1"/>
+          <p:cNvSpPr txBox="1"/>
+          <p:nvPr/>
+        </p:nvSpPr>
+        <p:spPr>
+          <a:xfrm>
+            <a:off x="640080" y="384048"/>
+            <a:ext cx="10881360" cy="640080"/>
+          </a:xfrm>
+          <a:prstGeom prst="rect">
+            <a:avLst/>
+          </a:prstGeom>
+          <a:noFill/>
+        </p:spPr>
+        <p:txBody>
+          <a:bodyPr wrap="square">
+            <a:spAutoFit/>
+          </a:bodyPr>
+          <a:lstStyle/>
+          <a:p>
+            <a:pPr algn="l">
+              <a:lnSpc>
+                <a:spcPct val="115000"/>
+              </a:lnSpc>
+            </a:pPr>
+            <a:r>
+              <a:rPr sz="2700" b="1">
+                <a:solidFill>
+                  <a:srgbClr val="1A1A1A"/>
+                </a:solidFill>
+                <a:latin typeface="Calibri"/>
+              </a:rPr>
+              <a:t>Why a random split is interpolation, not generalisation</a:t>
+            </a:r>
+          </a:p>
+        </p:txBody>
+      </p:sp>
+      <p:sp>
+        <p:nvSpPr>
+          <p:cNvPr id="3" name="Rectangle 2"/>
+          <p:cNvSpPr/>
+          <p:nvPr/>
+        </p:nvSpPr>
+        <p:spPr>
+          <a:xfrm>
+            <a:off x="640080" y="1207008"/>
+            <a:ext cx="10908792" cy="9525"/>
+          </a:xfrm>
+          <a:prstGeom prst="rect">
+            <a:avLst/>
+          </a:prstGeom>
+          <a:solidFill>
+            <a:srgbClr val="D8D6D0"/>
+          </a:solidFill>
+          <a:ln>
+            <a:noFill/>
+          </a:ln>
+          <a:effectLst/>
+        </p:spPr>
+        <p:style>
+          <a:lnRef idx="1">
+            <a:schemeClr val="accent1"/>
+          </a:lnRef>
+          <a:fillRef idx="3">
+            <a:schemeClr val="accent1"/>
+          </a:fillRef>
+          <a:effectRef idx="2">
+            <a:schemeClr val="accent1"/>
+          </a:effectRef>
+          <a:fontRef idx="minor">
+            <a:schemeClr val="lt1"/>
+          </a:fontRef>
+        </p:style>
+        <p:txBody>
+          <a:bodyPr rtlCol="0" anchor="ctr"/>
+          <a:lstStyle/>
+          <a:p>
+            <a:pPr algn="ctr"/>
+          </a:p>
+        </p:txBody>
+      </p:sp>
+      <p:sp>
+        <p:nvSpPr>
+          <p:cNvPr id="4" name="TextBox 3"/>
+          <p:cNvSpPr txBox="1"/>
+          <p:nvPr/>
+        </p:nvSpPr>
+        <p:spPr>
+          <a:xfrm>
+            <a:off x="640080" y="1600200"/>
+            <a:ext cx="10881360" cy="4754880"/>
+          </a:xfrm>
+          <a:prstGeom prst="rect">
+            <a:avLst/>
+          </a:prstGeom>
+          <a:noFill/>
+        </p:spPr>
+        <p:txBody>
+          <a:bodyPr wrap="square">
+            <a:spAutoFit/>
+          </a:bodyPr>
+          <a:lstStyle/>
           <a:p>
             <a:pPr algn="l">
               <a:lnSpc>
@@ -6483,13 +7219,77 @@
               </a:lnSpc>
             </a:pPr>
             <a:r>
+              <a:rPr sz="1500" b="0">
+                <a:solidFill>
+                  <a:srgbClr val="1A1A1A"/>
+                </a:solidFill>
+                <a:latin typeface="Calibri"/>
+              </a:rPr>
+              <a:t>Under a random split a target gauge usually has a trainable one nearby: 48% are within 10 km and 3.8% within 1 km, which is often the same river. Blocking moves the median from 10.4 km to 94.9 km.</a:t>
+            </a:r>
+          </a:p>
+          <a:p>
+            <a:pPr algn="l">
+              <a:lnSpc>
+                <a:spcPct val="145000"/>
+              </a:lnSpc>
+            </a:pPr>
+            <a:r>
+              <a:rPr sz="1500" b="0">
+                <a:solidFill>
+                  <a:srgbClr val="1A1A1A"/>
+                </a:solidFill>
+                <a:latin typeface="Calibri"/>
+              </a:rPr>
+              <a:t/>
+            </a:r>
+          </a:p>
+          <a:p>
+            <a:pPr algn="l">
+              <a:lnSpc>
+                <a:spcPct val="145000"/>
+              </a:lnSpc>
+            </a:pPr>
+            <a:r>
+              <a:rPr sz="1500" b="0">
+                <a:solidFill>
+                  <a:srgbClr val="1A1A1A"/>
+                </a:solidFill>
+                <a:latin typeface="Calibri"/>
+              </a:rPr>
+              <a:t>Neighbouring catchments share climate, geology and often a channel, so a model can score well by recognising a region rather than by learning how attributes map to response. A random split cannot tell those apart.</a:t>
+            </a:r>
+          </a:p>
+          <a:p>
+            <a:pPr algn="l">
+              <a:lnSpc>
+                <a:spcPct val="145000"/>
+              </a:lnSpc>
+            </a:pPr>
+            <a:r>
+              <a:rPr sz="1500" b="0">
+                <a:solidFill>
+                  <a:srgbClr val="1A1A1A"/>
+                </a:solidFill>
+                <a:latin typeface="Calibri"/>
+              </a:rPr>
+              <a:t/>
+            </a:r>
+          </a:p>
+          <a:p>
+            <a:pPr algn="l">
+              <a:lnSpc>
+                <a:spcPct val="145000"/>
+              </a:lnSpc>
+            </a:pPr>
+            <a:r>
               <a:rPr sz="1500" b="1">
                 <a:solidFill>
                   <a:srgbClr val="EB6834"/>
                 </a:solidFill>
                 <a:latin typeface="Calibri"/>
               </a:rPr>
-              <a:t>  No. Daily-only gains +0.0576; hourly supervision +0.0335 to +0.0327.</a:t>
+              <a:t>Three pieces of evidence that the shortcut is being used:</a:t>
             </a:r>
           </a:p>
           <a:p>
@@ -6505,7 +7305,7 @@
                 </a:solidFill>
                 <a:latin typeface="Calibri"/>
               </a:rPr>
-              <a:t>  All three arms were swept over the transfer learning rate, which had never been searched. Each peaks at 2e-4, and there the daily objective still leads by +0.0121.</a:t>
+              <a:t>  Within the random split itself, zero-shot skill falls with distance: median KGE 0.551 at 2.5 km against 0.460 at 32 km, Spearman -0.090. Same training set, same hyperparameters, only distance differs.</a:t>
             </a:r>
           </a:p>
           <a:p>
@@ -6521,7 +7321,274 @@
                 </a:solidFill>
                 <a:latin typeface="Calibri"/>
               </a:rPr>
-              <a:t>  The difference is entirely amplitude: daily supervision moves alpha 0.821 to 0.856, hourly supervision to 0.794.</a:t>
+              <a:t>  Blocking the split drops zero-shot KGE by 0.10, negative in all six networks.</a:t>
+            </a:r>
+          </a:p>
+          <a:p>
+            <a:pPr algn="l">
+              <a:lnSpc>
+                <a:spcPct val="145000"/>
+              </a:lnSpc>
+            </a:pPr>
+            <a:r>
+              <a:rPr sz="1500" b="0">
+                <a:solidFill>
+                  <a:srgbClr val="1A1A1A"/>
+                </a:solidFill>
+                <a:latin typeface="Calibri"/>
+              </a:rPr>
+              <a:t>  Fine-tuning brings both back together, 0.0069 apart. What blocking removed was nearby information, and daily aggregates restore it.</a:t>
+            </a:r>
+          </a:p>
+          <a:p>
+            <a:pPr algn="l">
+              <a:lnSpc>
+                <a:spcPct val="145000"/>
+              </a:lnSpc>
+            </a:pPr>
+            <a:r>
+              <a:rPr sz="1500" b="0">
+                <a:solidFill>
+                  <a:srgbClr val="1A1A1A"/>
+                </a:solidFill>
+                <a:latin typeface="Calibri"/>
+              </a:rPr>
+              <a:t/>
+            </a:r>
+          </a:p>
+          <a:p>
+            <a:pPr algn="l">
+              <a:lnSpc>
+                <a:spcPct val="145000"/>
+              </a:lnSpc>
+            </a:pPr>
+            <a:r>
+              <a:rPr sz="1500" b="0">
+                <a:solidFill>
+                  <a:srgbClr val="1A1A1A"/>
+                </a:solidFill>
+                <a:latin typeface="Calibri"/>
+              </a:rPr>
+              <a:t>Distance and attribute similarity cannot be separated in observational data, so the honest claim is narrow: part of the zero-shot score comes from a highly similar training catchment existing, not from generalising across attributes.</a:t>
+            </a:r>
+          </a:p>
+        </p:txBody>
+      </p:sp>
+    </p:spTree>
+  </p:cSld>
+  <p:clrMapOvr>
+    <a:masterClrMapping/>
+  </p:clrMapOvr>
+</p:sld>
+</file>
+
+<file path=ppt/slides/slide9.xml><?xml version="1.0" encoding="utf-8"?>
+<p:sld xmlns:a="http://schemas.openxmlformats.org/drawingml/2006/main" xmlns:p="http://schemas.openxmlformats.org/presentationml/2006/main" xmlns:r="http://schemas.openxmlformats.org/officeDocument/2006/relationships">
+  <p:cSld>
+    <p:spTree>
+      <p:nvGrpSpPr>
+        <p:cNvPr id="1" name=""/>
+        <p:cNvGrpSpPr/>
+        <p:nvPr/>
+      </p:nvGrpSpPr>
+      <p:grpSpPr/>
+      <p:sp>
+        <p:nvSpPr>
+          <p:cNvPr id="2" name="TextBox 1"/>
+          <p:cNvSpPr txBox="1"/>
+          <p:nvPr/>
+        </p:nvSpPr>
+        <p:spPr>
+          <a:xfrm>
+            <a:off x="640080" y="384048"/>
+            <a:ext cx="10881360" cy="640080"/>
+          </a:xfrm>
+          <a:prstGeom prst="rect">
+            <a:avLst/>
+          </a:prstGeom>
+          <a:noFill/>
+        </p:spPr>
+        <p:txBody>
+          <a:bodyPr wrap="square">
+            <a:spAutoFit/>
+          </a:bodyPr>
+          <a:lstStyle/>
+          <a:p>
+            <a:pPr algn="l">
+              <a:lnSpc>
+                <a:spcPct val="115000"/>
+              </a:lnSpc>
+            </a:pPr>
+            <a:r>
+              <a:rPr sz="2700" b="1">
+                <a:solidFill>
+                  <a:srgbClr val="1A1A1A"/>
+                </a:solidFill>
+                <a:latin typeface="Calibri"/>
+              </a:rPr>
+              <a:t>The blocked split, agency by agency</a:t>
+            </a:r>
+          </a:p>
+        </p:txBody>
+      </p:sp>
+      <p:sp>
+        <p:nvSpPr>
+          <p:cNvPr id="3" name="Rectangle 2"/>
+          <p:cNvSpPr/>
+          <p:nvPr/>
+        </p:nvSpPr>
+        <p:spPr>
+          <a:xfrm>
+            <a:off x="640080" y="1207008"/>
+            <a:ext cx="10908792" cy="9525"/>
+          </a:xfrm>
+          <a:prstGeom prst="rect">
+            <a:avLst/>
+          </a:prstGeom>
+          <a:solidFill>
+            <a:srgbClr val="D8D6D0"/>
+          </a:solidFill>
+          <a:ln>
+            <a:noFill/>
+          </a:ln>
+          <a:effectLst/>
+        </p:spPr>
+        <p:style>
+          <a:lnRef idx="1">
+            <a:schemeClr val="accent1"/>
+          </a:lnRef>
+          <a:fillRef idx="3">
+            <a:schemeClr val="accent1"/>
+          </a:fillRef>
+          <a:effectRef idx="2">
+            <a:schemeClr val="accent1"/>
+          </a:effectRef>
+          <a:fontRef idx="minor">
+            <a:schemeClr val="lt1"/>
+          </a:fontRef>
+        </p:style>
+        <p:txBody>
+          <a:bodyPr rtlCol="0" anchor="ctr"/>
+          <a:lstStyle/>
+          <a:p>
+            <a:pPr algn="ctr"/>
+          </a:p>
+        </p:txBody>
+      </p:sp>
+      <p:pic>
+        <p:nvPicPr>
+          <p:cNvPr id="4" name="Picture 3" descr="fig04_agency_recovery.png"/>
+          <p:cNvPicPr>
+            <a:picLocks noChangeAspect="1"/>
+          </p:cNvPicPr>
+          <p:nvPr/>
+        </p:nvPicPr>
+        <p:blipFill>
+          <a:blip r:embed="rId2"/>
+          <a:stretch>
+            <a:fillRect/>
+          </a:stretch>
+        </p:blipFill>
+        <p:spPr>
+          <a:xfrm>
+            <a:off x="2527667" y="1627632"/>
+            <a:ext cx="7136360" cy="2926080"/>
+          </a:xfrm>
+          <a:prstGeom prst="rect">
+            <a:avLst/>
+          </a:prstGeom>
+        </p:spPr>
+      </p:pic>
+      <p:sp>
+        <p:nvSpPr>
+          <p:cNvPr id="5" name="TextBox 4"/>
+          <p:cNvSpPr txBox="1"/>
+          <p:nvPr/>
+        </p:nvSpPr>
+        <p:spPr>
+          <a:xfrm>
+            <a:off x="640080" y="4754880"/>
+            <a:ext cx="10881360" cy="883920"/>
+          </a:xfrm>
+          <a:prstGeom prst="rect">
+            <a:avLst/>
+          </a:prstGeom>
+          <a:noFill/>
+        </p:spPr>
+        <p:txBody>
+          <a:bodyPr wrap="square">
+            <a:spAutoFit/>
+          </a:bodyPr>
+          <a:lstStyle/>
+          <a:p>
+            <a:pPr algn="l">
+              <a:lnSpc>
+                <a:spcPct val="130000"/>
+              </a:lnSpc>
+            </a:pPr>
+            <a:r>
+              <a:rPr sz="1600" b="1">
+                <a:solidFill>
+                  <a:srgbClr val="EB6834"/>
+                </a:solidFill>
+                <a:latin typeface="Calibri"/>
+              </a:rPr>
+              <a:t>Five of six networks recover 85 to 102 percent of what spatial blocking costs. Iceland, with 73 gauges, recovers 38 percent.</a:t>
+            </a:r>
+          </a:p>
+          <a:p>
+            <a:pPr algn="l">
+              <a:lnSpc>
+                <a:spcPct val="130000"/>
+              </a:lnSpc>
+            </a:pPr>
+            <a:r>
+              <a:rPr sz="1600" b="0">
+                <a:solidFill>
+                  <a:srgbClr val="1A1A1A"/>
+                </a:solidFill>
+                <a:latin typeface="Calibri"/>
+              </a:rPr>
+              <a:t>The method is weakest exactly where the gauge network is sparsest, which is worth stating plainly.</a:t>
+            </a:r>
+          </a:p>
+        </p:txBody>
+      </p:sp>
+      <p:sp>
+        <p:nvSpPr>
+          <p:cNvPr id="6" name="TextBox 5"/>
+          <p:cNvSpPr txBox="1"/>
+          <p:nvPr/>
+        </p:nvSpPr>
+        <p:spPr>
+          <a:xfrm>
+            <a:off x="640080" y="5693664"/>
+            <a:ext cx="10881360" cy="252095"/>
+          </a:xfrm>
+          <a:prstGeom prst="rect">
+            <a:avLst/>
+          </a:prstGeom>
+          <a:noFill/>
+        </p:spPr>
+        <p:txBody>
+          <a:bodyPr wrap="square">
+            <a:spAutoFit/>
+          </a:bodyPr>
+          <a:lstStyle/>
+          <a:p>
+            <a:pPr algn="l">
+              <a:lnSpc>
+                <a:spcPct val="115000"/>
+              </a:lnSpc>
+            </a:pPr>
+            <a:r>
+              <a:rPr sz="1100" b="0">
+                <a:solidFill>
+                  <a:srgbClr val="5A5A58"/>
+                </a:solidFill>
+                <a:latin typeface="Calibri"/>
+              </a:rPr>
+              <a:t>Blocking is 120 k-means blocks on 3-D unit vectors, packed whole into five folds, so fold sizes stay within 10 gauges of the random split's.</a:t>
             </a:r>
           </a:p>
         </p:txBody>

--- a/reports/slides/PhaseI_briefing.pptx
+++ b/reports/slides/PhaseI_briefing.pptx
@@ -1360,13 +1360,31 @@
           <a:lstStyle/>
           <a:p>
             <a:r>
-              <a:t>This is the slide to use if asked how we know the random split is contaminated. The within-split correlation is the strongest single piece, because the training set, hyperparameters and fold count are all identical and only distance varies, so it cannot be explained by the blocked split holding out harder regions.</a:t>
+              <a:t>Use this slide if asked how we know a random split is contaminated, and if asked which number to believe.</a:t>
             </a:r>
           </a:p>
           <a:p/>
           <a:p>
             <a:r>
-              <a:t>A random split also flatters the PRECISION, not only the level: fold-to-fold standard deviation of M1 is 0.0035 random against 0.0411 blocked, a factor of 11.8, because each blocked fold holds out different continents rather than a different sample of the same regions. Quote the blocked numbers with their spread as the honest ones.</a:t>
+              <a:t>The strongest single piece is within-split: zero-shot KGE falls from 0.551 at 2.5 km to 0.460 at 32 km, Spearman -0.090. Training set, hyperparameters and fold count are identical across those bands, so only distance varies and the blocked split holding out harder regions cannot explain it.</a:t>
+            </a:r>
+          </a:p>
+          <a:p/>
+          <a:p>
+            <a:r>
+              <a:t>Say the uncomfortable part before being asked: the deployment domain is about 81 times further than the blocked split, so 0.436 is still optimistic for Africa. The profile closes with a measurement rather than an extrapolation, since Africa's zero-shot median is observed at 0.114.</a:t>
+            </a:r>
+          </a:p>
+          <a:p/>
+          <a:p>
+            <a:r>
+              <a:t>One objection to blocked folds is residual dependence at block borders. Our minimum is 3.0 km and 4.1% sit within 20 km; removing those 361 gauges changes the gain from +0.1329 to +0.1338. The same buffer removes 77% of the random split and drops its zero-shot median from 0.531 to 0.476.</a:t>
+            </a:r>
+          </a:p>
+          <a:p/>
+          <a:p>
+            <a:r>
+              <a:t>A random split also flatters the PRECISION: fold-to-fold standard deviation of M1 is 0.0035 random against 0.0411 blocked, a factor of 11.8.</a:t>
             </a:r>
           </a:p>
         </p:txBody>
@@ -7142,7 +7160,7 @@
                 </a:solidFill>
                 <a:latin typeface="Calibri"/>
               </a:rPr>
-              <a:t>Why a random split is interpolation, not generalisation</a:t>
+              <a:t>Which evaluation number applies, and to what</a:t>
             </a:r>
           </a:p>
         </p:txBody>
@@ -7191,16 +7209,40 @@
           </a:p>
         </p:txBody>
       </p:sp>
-      <p:sp>
-        <p:nvSpPr>
-          <p:cNvPr id="4" name="TextBox 3"/>
+      <p:pic>
+        <p:nvPicPr>
+          <p:cNvPr id="4" name="Picture 3" descr="fig16_spatial_profile.png"/>
+          <p:cNvPicPr>
+            <a:picLocks noChangeAspect="1"/>
+          </p:cNvPicPr>
+          <p:nvPr/>
+        </p:nvPicPr>
+        <p:blipFill>
+          <a:blip r:embed="rId2"/>
+          <a:stretch>
+            <a:fillRect/>
+          </a:stretch>
+        </p:blipFill>
+        <p:spPr>
+          <a:xfrm>
+            <a:off x="2805995" y="1627632"/>
+            <a:ext cx="6579704" cy="2743200"/>
+          </a:xfrm>
+          <a:prstGeom prst="rect">
+            <a:avLst/>
+          </a:prstGeom>
+        </p:spPr>
+      </p:pic>
+      <p:sp>
+        <p:nvSpPr>
+          <p:cNvPr id="5" name="TextBox 4"/>
           <p:cNvSpPr txBox="1"/>
           <p:nvPr/>
         </p:nvSpPr>
         <p:spPr>
           <a:xfrm>
-            <a:off x="640080" y="1600200"/>
-            <a:ext cx="10881360" cy="4754880"/>
+            <a:off x="640080" y="4572000"/>
+            <a:ext cx="10881360" cy="1148080"/>
           </a:xfrm>
           <a:prstGeom prst="rect">
             <a:avLst/>
@@ -7215,161 +7257,72 @@
           <a:p>
             <a:pPr algn="l">
               <a:lnSpc>
-                <a:spcPct val="145000"/>
-              </a:lnSpc>
-            </a:pPr>
-            <a:r>
-              <a:rPr sz="1500" b="0">
+                <a:spcPct val="130000"/>
+              </a:lnSpc>
+            </a:pPr>
+            <a:r>
+              <a:rPr sz="1600" b="1">
+                <a:solidFill>
+                  <a:srgbClr val="EB6834"/>
+                </a:solidFill>
+                <a:latin typeface="Calibri"/>
+              </a:rPr>
+              <a:t>The two curves have opposite slopes: the further the model sits from anything it trained on, the worse it starts and the more the daily data returns.</a:t>
+            </a:r>
+          </a:p>
+          <a:p>
+            <a:pPr algn="l">
+              <a:lnSpc>
+                <a:spcPct val="130000"/>
+              </a:lnSpc>
+            </a:pPr>
+            <a:r>
+              <a:rPr sz="1600" b="0">
                 <a:solidFill>
                   <a:srgbClr val="1A1A1A"/>
                 </a:solidFill>
                 <a:latin typeface="Calibri"/>
               </a:rPr>
-              <a:t>Under a random split a target gauge usually has a trainable one nearby: 48% are within 10 km and 3.8% within 1 km, which is often the same river. Blocking moves the median from 10.4 km to 94.9 km.</a:t>
-            </a:r>
-          </a:p>
-          <a:p>
-            <a:pPr algn="l">
-              <a:lnSpc>
-                <a:spcPct val="145000"/>
-              </a:lnSpc>
-            </a:pPr>
-            <a:r>
-              <a:rPr sz="1500" b="0">
-                <a:solidFill>
-                  <a:srgbClr val="1A1A1A"/>
-                </a:solidFill>
-                <a:latin typeface="Calibri"/>
-              </a:rPr>
-              <a:t/>
-            </a:r>
-          </a:p>
-          <a:p>
-            <a:pPr algn="l">
-              <a:lnSpc>
-                <a:spcPct val="145000"/>
-              </a:lnSpc>
-            </a:pPr>
-            <a:r>
-              <a:rPr sz="1500" b="0">
-                <a:solidFill>
-                  <a:srgbClr val="1A1A1A"/>
-                </a:solidFill>
-                <a:latin typeface="Calibri"/>
-              </a:rPr>
-              <a:t>Neighbouring catchments share climate, geology and often a channel, so a model can score well by recognising a region rather than by learning how attributes map to response. A random split cannot tell those apart.</a:t>
-            </a:r>
-          </a:p>
-          <a:p>
-            <a:pPr algn="l">
-              <a:lnSpc>
-                <a:spcPct val="145000"/>
-              </a:lnSpc>
-            </a:pPr>
-            <a:r>
-              <a:rPr sz="1500" b="0">
-                <a:solidFill>
-                  <a:srgbClr val="1A1A1A"/>
-                </a:solidFill>
-                <a:latin typeface="Calibri"/>
-              </a:rPr>
-              <a:t/>
-            </a:r>
-          </a:p>
-          <a:p>
-            <a:pPr algn="l">
-              <a:lnSpc>
-                <a:spcPct val="145000"/>
-              </a:lnSpc>
-            </a:pPr>
-            <a:r>
-              <a:rPr sz="1500" b="1">
-                <a:solidFill>
-                  <a:srgbClr val="EB6834"/>
-                </a:solidFill>
-                <a:latin typeface="Calibri"/>
-              </a:rPr>
-              <a:t>Three pieces of evidence that the shortcut is being used:</a:t>
-            </a:r>
-          </a:p>
-          <a:p>
-            <a:pPr algn="l">
-              <a:lnSpc>
-                <a:spcPct val="145000"/>
-              </a:lnSpc>
-            </a:pPr>
-            <a:r>
-              <a:rPr sz="1500" b="0">
-                <a:solidFill>
-                  <a:srgbClr val="1A1A1A"/>
-                </a:solidFill>
-                <a:latin typeface="Calibri"/>
-              </a:rPr>
-              <a:t>  Within the random split itself, zero-shot skill falls with distance: median KGE 0.551 at 2.5 km against 0.460 at 32 km, Spearman -0.090. Same training set, same hyperparameters, only distance differs.</a:t>
-            </a:r>
-          </a:p>
-          <a:p>
-            <a:pPr algn="l">
-              <a:lnSpc>
-                <a:spcPct val="145000"/>
-              </a:lnSpc>
-            </a:pPr>
-            <a:r>
-              <a:rPr sz="1500" b="0">
-                <a:solidFill>
-                  <a:srgbClr val="1A1A1A"/>
-                </a:solidFill>
-                <a:latin typeface="Calibri"/>
-              </a:rPr>
-              <a:t>  Blocking the split drops zero-shot KGE by 0.10, negative in all six networks.</a:t>
-            </a:r>
-          </a:p>
-          <a:p>
-            <a:pPr algn="l">
-              <a:lnSpc>
-                <a:spcPct val="145000"/>
-              </a:lnSpc>
-            </a:pPr>
-            <a:r>
-              <a:rPr sz="1500" b="0">
-                <a:solidFill>
-                  <a:srgbClr val="1A1A1A"/>
-                </a:solidFill>
-                <a:latin typeface="Calibri"/>
-              </a:rPr>
-              <a:t>  Fine-tuning brings both back together, 0.0069 apart. What blocking removed was nearby information, and daily aggregates restore it.</a:t>
-            </a:r>
-          </a:p>
-          <a:p>
-            <a:pPr algn="l">
-              <a:lnSpc>
-                <a:spcPct val="145000"/>
-              </a:lnSpc>
-            </a:pPr>
-            <a:r>
-              <a:rPr sz="1500" b="0">
-                <a:solidFill>
-                  <a:srgbClr val="1A1A1A"/>
-                </a:solidFill>
-                <a:latin typeface="Calibri"/>
-              </a:rPr>
-              <a:t/>
-            </a:r>
-          </a:p>
-          <a:p>
-            <a:pPr algn="l">
-              <a:lnSpc>
-                <a:spcPct val="145000"/>
-              </a:lnSpc>
-            </a:pPr>
-            <a:r>
-              <a:rPr sz="1500" b="0">
-                <a:solidFill>
-                  <a:srgbClr val="1A1A1A"/>
-                </a:solidFill>
-                <a:latin typeface="Calibri"/>
-              </a:rPr>
-              <a:t>Distance and attribute similarity cannot be separated in observational data, so the honest claim is narrow: part of the zero-shot score comes from a highly similar training catchment existing, not from generalising across attributes.</a:t>
+              <a:t>The deployment domain is measured, not assumed. Africa sits a median 7,621 km from the training network, so 100% of real targets are further away than either split's median.</a:t>
+            </a:r>
+          </a:p>
+        </p:txBody>
+      </p:sp>
+      <p:sp>
+        <p:nvSpPr>
+          <p:cNvPr id="6" name="TextBox 5"/>
+          <p:cNvSpPr txBox="1"/>
+          <p:nvPr/>
+        </p:nvSpPr>
+        <p:spPr>
+          <a:xfrm>
+            <a:off x="640080" y="5774944"/>
+            <a:ext cx="10881360" cy="412749"/>
+          </a:xfrm>
+          <a:prstGeom prst="rect">
+            <a:avLst/>
+          </a:prstGeom>
+          <a:noFill/>
+        </p:spPr>
+        <p:txBody>
+          <a:bodyPr wrap="square">
+            <a:spAutoFit/>
+          </a:bodyPr>
+          <a:lstStyle/>
+          <a:p>
+            <a:pPr algn="l">
+              <a:lnSpc>
+                <a:spcPct val="115000"/>
+              </a:lnSpc>
+            </a:pPr>
+            <a:r>
+              <a:rPr sz="1100" b="0">
+                <a:solidFill>
+                  <a:srgbClr val="5A5A58"/>
+                </a:solidFill>
+                <a:latin typeface="Calibri"/>
+              </a:rPr>
+              <a:t>Marker area is the band's gauge count. Under a random split 48% of held-out gauges have a trainable one within 10 km and 3.8% within 1 km, often the same river.</a:t>
             </a:r>
           </a:p>
         </p:txBody>
